--- a/research/ftir_ec_phase3/deliverables/satoshi_deck_2026-08-13.pptx
+++ b/research/ftir_ec_phase3/deliverables/satoshi_deck_2026-08-13.pptx
@@ -21,9 +21,10 @@
     <p:sldId id="269" r:id="rId15"/>
     <p:sldId id="270" r:id="rId16"/>
     <p:sldId id="271" r:id="rId17"/>
+    <p:sldId id="272" r:id="rId18"/>
   </p:sldIdLst>
   <p:notesMasterIdLst>
-    <p:notesMasterId r:id="rId18"/>
+    <p:notesMasterId r:id="rId19"/>
   </p:notesMasterIdLst>
   <p:sldSz cx="12192000" cy="6858000"/>
   <p:notesSz cx="6858000" cy="12192000"/>
@@ -517,7 +518,7 @@
           <a:p>
             <a:r>
               <a:rPr lang="en-US" dirty="0"/>
-              <a:t>Since the spring check-in the whole thread has been reworked. This walks the argument, then the asks. Roughly 30 minutes of content — parts B and C are where your input matters most.</a:t>
+              <a:t>Naveed is joining too — he had the SPARTAN EC thread before the handoff, so the recap slides are for him as much as Satoshi. Roughly 30 minutes of content; parts B and C are where Satoshi's input matters most.</a:t>
             </a:r>
             <a:endParaRPr lang="en-US" dirty="0"/>
           </a:p>
@@ -605,7 +606,7 @@
           <a:p>
             <a:r>
               <a:rPr lang="en-US" dirty="0"/>
-              <a:t>SAY: The raw model fails by extrapolation; the corrected model misses by a flat constant that no cohort choice removes. That flat constant is the object of part D — restated as roughly 21 inverse megametres of absorption with no FTIR-EC behind it, exactly MAC-invariant, with three surviving explanations: a loading-dependent HIPS artifact, curve geometry in the Fabs–EC relation, and real non-EC absorption. Nothing in hand separates them — that is the quartz ask.</a:t>
+              <a:t>SAY: This is the slide Ann asked for yesterday — everything twice, one protocol per side. Two takeaways: robustness to protocol is itself a model-selection criterion, and only one setup has it; and the order-dependence result means the app's k is not a reproducible quantity. Framing discipline: this is not a criticism of the app as a tool — interleaved CV answers a different question than transfer to an unseen site.</a:t>
             </a:r>
             <a:endParaRPr lang="en-US" dirty="0"/>
           </a:p>
@@ -693,7 +694,7 @@
           <a:p>
             <a:r>
               <a:rPr lang="en-US" dirty="0"/>
-              <a:t>SAY: The intercept ladder is MAC-proof and R² cannot arbitrate MAC — the fork is purely a slope contest between two self-consistent branches. Deliberate phrasing: the corrected model “lands closest” at MAC 10 — 0.86 does not clear the |slope−1| ≤ 0.1 bar the raw models clear at MAC 6.</a:t>
+              <a:t>SAY: The raw model fails by extrapolation; the corrected model misses by a flat constant that no cohort choice removes. Restated as absorption, that constant is C = |intercept| × MAC / slope — about 21 inverse megametres, 46% of a typical Addis filter's Fabs, and exactly MAC-invariant. Three explanations survive: a loading-dependent HIPS artifact, curve geometry in the Fabs–EC relation, and real non-EC absorption. Nothing in hand separates them — that is the quartz ask. On Ann's estimator point: we now have a real sigma-x from HIPS_Uncertainty, and Deming moves the intercept to −2.09, so the OLS number understates the offset if anything.</a:t>
             </a:r>
             <a:endParaRPr lang="en-US" dirty="0"/>
           </a:p>
@@ -781,7 +782,7 @@
           <a:p>
             <a:r>
               <a:rPr lang="en-US" dirty="0"/>
-              <a:t>SAY: The net phase-3 read is MAC ≈ 10, the corrected model, and a genuine additive component at Addis whose owner is not yet identified — loading-dependent HIPS artifact, curve geometry, or real non-EC absorption. We would like your judgment on this chain, and whether an independent HIPS MAC or protocol bridge exists that could test it without new sampling. Quote 10.05 only with its qualifier: the Addis-like subset, 6,503 filters.</a:t>
+              <a:t>SAY: The intercept ladder is MAC-proof and R² cannot arbitrate MAC — the fork is purely a slope contest between two self-consistent branches. Deliberate phrasing: the corrected model “lands closest” at MAC 10 — 0.86 does not clear the |slope−1| ≤ 0.1 bar the raw models clear at MAC 6. Yesterday's discussion of letting the slope define MAC is on the slide with its circularity caveat, so it is pre-answered if Naveed raises it.</a:t>
             </a:r>
             <a:endParaRPr lang="en-US" dirty="0"/>
           </a:p>
@@ -869,7 +870,7 @@
           <a:p>
             <a:r>
               <a:rPr lang="en-US" dirty="0"/>
-              <a:t>SAY: Two asks live on this slide. Where does the sub-1500 model stand — it is the unblocking tool for carboxylate versus aromatic C=C. And can we get Emily Lee's charcoal spectra as data — the paper versions are print-only, and burning chemistry (O–H and aliphatic C–H destroyed, aromatic C=C grown, stronger with temperature) is the process argument for the aromatic reading.</a:t>
+              <a:t>SAY: The net phase-3 read is MAC ≈ 10, the corrected model, and a genuine additive component at Addis whose owner is not yet identified. We would like your judgment on this chain, and whether an independent HIPS MAC or protocol bridge exists that could test it without new sampling. Quote 10.05 only with its qualifier: the Addis-like subset, 6,503 filters.</a:t>
             </a:r>
             <a:endParaRPr lang="en-US" dirty="0"/>
           </a:p>
@@ -957,7 +958,7 @@
           <a:p>
             <a:r>
               <a:rPr lang="en-US" dirty="0"/>
-              <a:t>SAY: Season moves loading, not shape — and a season-blind mixture component isolates the same Oct–Feb anomaly the residuals show, so three independent views agree. ftir_24 quantifies it with a pooled season-by-x design to avoid the mechanical slope attenuation from Dry's shorter x-range.</a:t>
+              <a:t>SAY: Two asks live on this slide. Where does the sub-1500 model stand — it is the unblocking tool for carboxylate versus aromatic C=C. And can we get Emily Lee's charcoal spectra as data — the paper versions are print-only, and burning chemistry (O–H and aliphatic C–H destroyed, aromatic C=C grown, stronger with temperature) is the process argument for the aromatic reading.</a:t>
             </a:r>
             <a:endParaRPr lang="en-US" dirty="0"/>
           </a:p>
@@ -1045,7 +1046,7 @@
           <a:p>
             <a:r>
               <a:rPr lang="en-US" dirty="0"/>
-              <a:t>SAY: Since Addis's extreme ranking is computed from the very FTIR/HIPS values under suspicion, we cannot currently tell how much of the extremity is the artifact. The spectra pull that would include ETBI is the cheapest unblocking step on the list — and we have pre-registered the prediction: if the ~21 Mm⁻¹ were a persistent background, ETBI's FTIR-EC should come out very low.</a:t>
+              <a:t>SAY: Season moves loading, not shape — and a season-blind mixture component isolates the same Oct–Feb anomaly the residuals show, so three independent views agree. ftir_24 quantifies it with a pooled season-by-x design to avoid the mechanical slope attenuation from Dry's shorter x-range.</a:t>
             </a:r>
             <a:endParaRPr lang="en-US" dirty="0"/>
           </a:p>
@@ -1133,7 +1134,7 @@
           <a:p>
             <a:r>
               <a:rPr lang="en-US" dirty="0"/>
-              <a:t>The ask order changed this week: quartz TOR is the headline because ftir_26/27 closed every in-hand route to an independent EC reference. Hand over the one-pager here if Ann approved it. The five supporting asks are cheap for him and high-leverage for us — the spectra export especially.</a:t>
+              <a:t>SAY: Since Addis's extreme ranking is computed from the very FTIR/HIPS values under suspicion, we cannot currently tell how much of the extremity is the artifact. The spectra pull that would include ETBI is the cheapest unblocking step on the list — and we have pre-registered the prediction: if the ~21 Mm⁻¹ were a persistent background, ETBI's FTIR-EC should come out very low.</a:t>
             </a:r>
             <a:endParaRPr lang="en-US" dirty="0"/>
           </a:p>
@@ -1157,6 +1158,94 @@
             <a:fld id="{F7021451-1387-4CA6-816F-3879F97B5CBC}" type="slidenum">
               <a:rPr lang="en-US"/>
               <a:t>16</a:t>
+            </a:fld>
+            <a:endParaRPr lang="en-US"/>
+          </a:p>
+        </p:txBody>
+      </p:sp>
+    </p:spTree>
+    <p:extLst>
+      <p:ext uri="{BB962C8B-B14F-4D97-AF65-F5344CB8AC3E}">
+        <p14:creationId xmlns:p14="http://schemas.microsoft.com/office/powerpoint/2010/main" val="1024086991"/>
+      </p:ext>
+    </p:extLst>
+  </p:cSld>
+  <p:clrMapOvr>
+    <a:masterClrMapping/>
+  </p:clrMapOvr>
+</p:notes>
+</file>
+
+<file path=ppt/notesSlides/notesSlide17.xml><?xml version="1.0" encoding="utf-8"?>
+<p:notes xmlns:a="http://schemas.openxmlformats.org/drawingml/2006/main" xmlns:r="http://schemas.openxmlformats.org/officeDocument/2006/relationships" xmlns:p="http://schemas.openxmlformats.org/presentationml/2006/main">
+  <p:cSld>
+    <p:spTree>
+      <p:nvGrpSpPr>
+        <p:cNvPr id="1" name=""/>
+        <p:cNvGrpSpPr/>
+        <p:nvPr/>
+      </p:nvGrpSpPr>
+      <p:grpSpPr>
+        <a:xfrm>
+          <a:off x="0" y="0"/>
+          <a:ext cx="0" cy="0"/>
+          <a:chOff x="0" y="0"/>
+          <a:chExt cx="0" cy="0"/>
+        </a:xfrm>
+      </p:grpSpPr>
+      <p:sp>
+        <p:nvSpPr>
+          <p:cNvPr id="2" name="Slide Image Placeholder 1"/>
+          <p:cNvSpPr>
+            <a:spLocks noGrp="1" noRot="1" noChangeAspect="1"/>
+          </p:cNvSpPr>
+          <p:nvPr>
+            <p:ph type="sldImg"/>
+          </p:nvPr>
+        </p:nvSpPr>
+        <p:spPr/>
+      </p:sp>
+      <p:sp>
+        <p:nvSpPr>
+          <p:cNvPr id="3" name="Notes Placeholder 2"/>
+          <p:cNvSpPr>
+            <a:spLocks noGrp="1"/>
+          </p:cNvSpPr>
+          <p:nvPr>
+            <p:ph type="body" idx="1"/>
+          </p:nvPr>
+        </p:nvSpPr>
+        <p:spPr/>
+        <p:txBody>
+          <a:bodyPr/>
+          <a:lstStyle/>
+          <a:p>
+            <a:r>
+              <a:rPr lang="en-US" dirty="0"/>
+              <a:t>The ask order changed this week: quartz TOR is the headline because ftir_26/27 closed every in-hand route to an independent EC reference. Hand over the one-pager here — Ann has seen it. The components question is folded into the baselining card since they are both his-methods territory.</a:t>
+            </a:r>
+            <a:endParaRPr lang="en-US" dirty="0"/>
+          </a:p>
+        </p:txBody>
+      </p:sp>
+      <p:sp>
+        <p:nvSpPr>
+          <p:cNvPr id="4" name="Slide Number Placeholder 3"/>
+          <p:cNvSpPr>
+            <a:spLocks noGrp="1"/>
+          </p:cNvSpPr>
+          <p:nvPr>
+            <p:ph type="sldNum" sz="quarter" idx="10"/>
+          </p:nvPr>
+        </p:nvSpPr>
+        <p:spPr/>
+        <p:txBody>
+          <a:bodyPr/>
+          <a:lstStyle/>
+          <a:p>
+            <a:fld id="{F7021451-1387-4CA6-816F-3879F97B5CBC}" type="slidenum">
+              <a:rPr lang="en-US"/>
+              <a:t>17</a:t>
             </a:fld>
             <a:endParaRPr lang="en-US"/>
           </a:p>
@@ -1221,7 +1310,7 @@
           <a:p>
             <a:r>
               <a:rPr lang="en-US" dirty="0"/>
-              <a:t>Let him read while you frame it: everything left is committed and reproducible; everything right is why this meeting exists.</a:t>
+              <a:t>Let him read while you frame it: everything left is committed and reproducible; everything right is why this meeting exists. The component-count question is new on the list — it came out of yesterday's meeting with Ann.</a:t>
             </a:r>
             <a:endParaRPr lang="en-US" dirty="0"/>
           </a:p>
@@ -1309,7 +1398,7 @@
           <a:p>
             <a:r>
               <a:rPr lang="en-US" dirty="0"/>
-              <a:t>SAY: The network calibration carried to Addis is steep with a deep negative intercept — and nothing at Addis has negative EC, so the offset is the model, not the air. At MAC 6 the slope pivots but the intercept stays exactly put; we will prove that invariance in part D.</a:t>
+              <a:t>SAY: The network calibration carried to Addis is steep with a deep negative intercept — and nothing at Addis has negative EC, so the offset is the model, not the air. One framing from yesterday: with no MAC applied at all, the deployed fit implies a native MAC of about 10 over 1.90, roughly 5.3 — but that trusts FTIR-EC, which is the same circularity that rules out ChemSpec as a reference. The non-circular version of that idea is the implied-MAC bridge in part D.</a:t>
             </a:r>
             <a:endParaRPr lang="en-US" dirty="0"/>
           </a:p>
@@ -1397,7 +1486,7 @@
           <a:p>
             <a:r>
               <a:rPr lang="en-US" dirty="0"/>
-              <a:t>SAY: Taking the 800 lowest-OC/EC filters is the closest IMPROVE can get to Addis composition — and that cohort wins on both the Addis crossplot and a locked disjoint-site TOR test, like-for-like. Cohort engineering beyond this point breaks the TOR test, so this is the terminal IMPROVE-only candidate.</a:t>
+              <a:t>SAY: Ann asked yesterday whether the shape-selected and composition-selected cohorts overlap — in theory shape should reflect the OC/EC ratio. From the committed membership tables: one filter of three hundred. They are disjoint selections, which is consistent with their opposite behaviour — the shape-selected cohort fails the held-out TOR test while this one passes. QUESTION FOR SATOSHI: why does spectral-shape similarity fail to track composition here — is that a baseline effect too?</a:t>
             </a:r>
             <a:endParaRPr lang="en-US" dirty="0"/>
           </a:p>
@@ -1485,7 +1574,7 @@
           <a:p>
             <a:r>
               <a:rPr lang="en-US" dirty="0"/>
-              <a:t>SAY: Six training-set choices, one protocol per column set. The corrected setup is the one whose answer barely depends on who processed it — the strongest robustness claim in the deck. Note row 1 is the whole IMPROVE network: the only SPARTAN spectra we hold are ETAD's, and those are evaluation-only, never training data.</a:t>
+              <a:t>SAY: One thing that confused us yesterday and is worth stating plainly: the biomass-smoke intercept is −0.99 on this table and −6.91 on older slides — both are right; they are two protocols, k = 4 versus k = 19 on the same filters. That swing is itself a finding: the component choice moves the Addis answer more than the MAC fork can. The corrected setup is the one whose answer does not depend on who processed it. All intercepts on this slide are micrograms per cubic metre.</a:t>
             </a:r>
             <a:endParaRPr lang="en-US" dirty="0"/>
           </a:p>
@@ -1573,7 +1662,7 @@
           <a:p>
             <a:r>
               <a:rPr lang="en-US" dirty="0"/>
-              <a:t>SAY: A PLS model on raw spectra is handed a predictor that is mostly background, and is free to lean on it. The port is validated against your R output to six times ten-to-the-minus-seven — this is your algorithm. And your EDF question has an answer: six versus eight makes no practical difference.</a:t>
+              <a:t>SAY: A PLS model on raw spectra is handed a predictor that is mostly background, and is free to lean on it. The port is validated against your R output — this is your algorithm, not an approximation. And your EDF question has an answer: six versus eight makes no practical difference.</a:t>
             </a:r>
             <a:endParaRPr lang="en-US" dirty="0"/>
           </a:p>
@@ -1837,7 +1926,7 @@
           <a:p>
             <a:r>
               <a:rPr lang="en-US" dirty="0"/>
-              <a:t>SAY: Look at biomass-smoke, top middle — interleaved it looks fine; hold the sites out and the floor rises sixty percent. Lowest-OC/EC, bottom middle — the lines sit on top of each other. On second-derivative spectra the whole effect disappears, so what an interleaved fold leaks is the site's characteristic background. That is the same quantity as the AIRSpec story, from a completely different direction. Also: interleaved CV is row-order dependent — the same 800 filters give k = 15, 18 or 19 on reorderings; site-grouped gives 5 every time.</a:t>
+              <a:t>SAY: Every headline number uses one rule — site-grouped five-fold, first major minimum. QUESTION FOR SATOSHI: is four or five components defensibly enough, especially on corrected spectra? And does comparing across models require matching the component count, or is per-model selection under one rule the right discipline? Ann flags that four or five factors on raw spectra can still be mostly Teflon. Also have ready: the ±SE ribbons on the network and smoke panels are huge — the interleaved curve only looks decisive because pooling discards that spread.</a:t>
             </a:r>
             <a:endParaRPr lang="en-US" dirty="0"/>
           </a:p>
@@ -2243,7 +2332,7 @@
                 <a:ea typeface="Courier New" pitchFamily="34" charset="-122"/>
                 <a:cs typeface="Courier New" pitchFamily="34" charset="-120"/>
               </a:rPr>
-              <a:t>FTIR · EC CALIBRATION · ADDIS ABABA · BRIEFING FOR SATOSHI · 13 AUG 2026</a:t>
+              <a:t>FTIR · EC CALIBRATION · ADDIS ABABA · BRIEFING FOR SATOSHI &amp; NAVEED · 13 AUG 2026</a:t>
             </a:r>
             <a:endParaRPr lang="en-US" sz="1200" dirty="0"/>
           </a:p>
@@ -2383,7 +2472,7 @@
                 <a:ea typeface="Courier New" pitchFamily="34" charset="-122"/>
                 <a:cs typeface="Courier New" pitchFamily="34" charset="-120"/>
               </a:rPr>
-              <a:t>Notebooks ftir_11–27 · fixed 190-filter Addis cohort for crossplots · MAC = 10 headline · site-disjoint splits (seed 20260717) · every number traces to a committed table.</a:t>
+              <a:t>Notebooks ftir_11–27 · fixed 190-filter Addis cohort for crossplots · intercepts in µg/m³ · MAC = 10 headline · site-disjoint splits (seed 20260717) · every number traces to a committed table.</a:t>
             </a:r>
             <a:endParaRPr lang="en-US" sz="1000" dirty="0"/>
           </a:p>
@@ -2454,7 +2543,7 @@
                 <a:ea typeface="Courier New" pitchFamily="34" charset="-122"/>
                 <a:cs typeface="Courier New" pitchFamily="34" charset="-120"/>
               </a:rPr>
-              <a:t>C·08 · RESIDUAL STRUCTURE — RAW VS CORRECTED</a:t>
+              <a:t>C·07B · THE SAME SIX SETUPS UNDER BOTH PROTOCOLS — ANN'S REQUEST</a:t>
             </a:r>
             <a:endParaRPr lang="en-US" sz="1100" dirty="0"/>
           </a:p>
@@ -2493,7 +2582,7 @@
                 <a:ea typeface="Calibri" pitchFamily="34" charset="-122"/>
                 <a:cs typeface="Calibri" pitchFamily="34" charset="-120"/>
               </a:rPr>
-              <a:t>The corrected model misses by a season-stable constant: −2.0 to −2.6 µg/m³.</a:t>
+              <a:t>The component protocol moves the Addis answer more than the MAC fork can.</a:t>
             </a:r>
             <a:endParaRPr lang="en-US" sz="2600" dirty="0"/>
           </a:p>
@@ -2533,7 +2622,7 @@
       </p:sp>
       <p:pic>
         <p:nvPicPr>
-          <p:cNvPr id="5" name="Image 0" descr="/Users/ahmadjalil/github/aethmodular/research/ftir_ec_phase3/output/plots/deck/by_protocol/site_held_out/residual_vs_d2.png">    </p:cNvPr>
+          <p:cNvPr id="5" name="Image 0" descr="/private/tmp/claude-501/-Users-ahmadjalil-github-aethmodular/98af0981-a12c-4f18-82f4-663747dfdcd7/scratchpad/plates/intercept_slope_by_mode.png">    </p:cNvPr>
           <p:cNvPicPr>
             <a:picLocks noChangeAspect="1"/>
           </p:cNvPicPr>
@@ -2587,7 +2676,7 @@
                 <a:ea typeface="Courier New" pitchFamily="34" charset="-122"/>
                 <a:cs typeface="Courier New" pitchFamily="34" charset="-120"/>
               </a:rPr>
-              <a:t>ftir_15/22 · residual_vs_d2   </a:t>
+              <a:t>ftir_21 · intercept_slope_by_mode   </a:t>
             </a:r>
             <a:pPr indent="0" marL="0">
               <a:buNone/>
@@ -2601,7 +2690,7 @@
                 <a:ea typeface="Calibri" pitchFamily="34" charset="-122"/>
                 <a:cs typeface="Calibri" pitchFamily="34" charset="-120"/>
               </a:rPr>
-              <a:t>Residual vs Mahalanobis D² in score space; site-cluster bootstrap B = 200</a:t>
+              <a:t>Calibration-app protocol vs site-held-out, per setup; intercepts µg/m³</a:t>
             </a:r>
             <a:endParaRPr lang="en-US" sz="850" dirty="0"/>
           </a:p>
@@ -2616,7 +2705,7 @@
         <p:spPr>
           <a:xfrm>
             <a:off x="502920" y="1737360"/>
-            <a:ext cx="3291840" cy="3657600"/>
+            <a:ext cx="3291840" cy="3840480"/>
           </a:xfrm>
           <a:prstGeom prst="rect">
             <a:avLst/>
@@ -2643,7 +2732,7 @@
                 <a:ea typeface="Calibri" pitchFamily="34" charset="-122"/>
                 <a:cs typeface="Calibri" pitchFamily="34" charset="-120"/>
               </a:rPr>
-              <a:t>The raw model's Addis error tracks extrapolation distance (r = 0.71) and flips sign by season — it fails by being out of domain.</a:t>
+              <a:t>Same filters, two protocols: smoke-906 swings −6.91 → −0.99; OCEC-800 swings −4.59 → −3.22. The corrected setup moves −1.65 → −1.62.</a:t>
             </a:r>
             <a:endParaRPr lang="en-US" sz="1250" dirty="0"/>
           </a:p>
@@ -2663,7 +2752,7 @@
                 <a:ea typeface="Calibri" pitchFamily="34" charset="-122"/>
                 <a:cs typeface="Calibri" pitchFamily="34" charset="-120"/>
               </a:rPr>
-              <a:t>The corrected model's error is D²-independent and flat in every season. Bootstrap: corrected intercept 95% CI [−1.78, −1.06] — excludes zero, disjoint from raw's [−4.88, −2.81].</a:t>
+              <a:t>And the app protocol is not reproducible: interleaved CV is row-order dependent — the same 800 filters give k = 15, 18 or 19 on reorderings; site-grouped gives 5 every time.</a:t>
             </a:r>
             <a:endParaRPr lang="en-US" sz="1250" dirty="0"/>
           </a:p>
@@ -2683,7 +2772,7 @@
                 <a:ea typeface="Calibri" pitchFamily="34" charset="-122"/>
                 <a:cs typeface="Calibri" pitchFamily="34" charset="-120"/>
               </a:rPr>
-              <a:t>A constant that survives every modelling choice is the shape of something additive in the x-axis data — which part D makes precise.</a:t>
+              <a:t>The app also yields no site-disjoint test by construction — only the site-held-out protocol produces the TOR test that picks 800 as the cohort size.</a:t>
             </a:r>
             <a:endParaRPr lang="en-US" sz="1250" dirty="0"/>
           </a:p>
@@ -2697,7 +2786,7 @@
         </p:nvSpPr>
         <p:spPr>
           <a:xfrm>
-            <a:off x="502920" y="5074920"/>
+            <a:off x="502920" y="5440680"/>
             <a:ext cx="3246120" cy="402336"/>
           </a:xfrm>
           <a:prstGeom prst="roundRect">
@@ -2724,7 +2813,7 @@
         </p:nvSpPr>
         <p:spPr>
           <a:xfrm>
-            <a:off x="612648" y="5074920"/>
+            <a:off x="612648" y="5440680"/>
             <a:ext cx="3063240" cy="402336"/>
           </a:xfrm>
           <a:prstGeom prst="rect">
@@ -2749,7 +2838,7 @@
                 <a:ea typeface="Calibri" pitchFamily="34" charset="-122"/>
                 <a:cs typeface="Calibri" pitchFamily="34" charset="-120"/>
               </a:rPr>
-              <a:t>raw: resid ~ D²  </a:t>
+              <a:t>smoke by protocol  </a:t>
             </a:r>
             <a:pPr indent="0" marL="0">
               <a:buNone/>
@@ -2757,13 +2846,13 @@
             <a:r>
               <a:rPr lang="en-US" sz="1100" b="1" dirty="0">
                 <a:solidFill>
-                  <a:srgbClr val="B23327"/>
-                </a:solidFill>
-                <a:latin typeface="Calibri" pitchFamily="34" charset="0"/>
-                <a:ea typeface="Calibri" pitchFamily="34" charset="-122"/>
-                <a:cs typeface="Calibri" pitchFamily="34" charset="-120"/>
-              </a:rPr>
-              <a:t>r = 0.71</a:t>
+                  <a:srgbClr val="B0792B"/>
+                </a:solidFill>
+                <a:latin typeface="Calibri" pitchFamily="34" charset="0"/>
+                <a:ea typeface="Calibri" pitchFamily="34" charset="-122"/>
+                <a:cs typeface="Calibri" pitchFamily="34" charset="-120"/>
+              </a:rPr>
+              <a:t>−6.91 → −0.99</a:t>
             </a:r>
             <a:endParaRPr lang="en-US" sz="1100" dirty="0"/>
           </a:p>
@@ -2777,7 +2866,7 @@
         </p:nvSpPr>
         <p:spPr>
           <a:xfrm>
-            <a:off x="502920" y="5586984"/>
+            <a:off x="502920" y="5952744"/>
             <a:ext cx="3246120" cy="402336"/>
           </a:xfrm>
           <a:prstGeom prst="roundRect">
@@ -2804,7 +2893,7 @@
         </p:nvSpPr>
         <p:spPr>
           <a:xfrm>
-            <a:off x="612648" y="5586984"/>
+            <a:off x="612648" y="5952744"/>
             <a:ext cx="3063240" cy="402336"/>
           </a:xfrm>
           <a:prstGeom prst="rect">
@@ -2829,7 +2918,7 @@
                 <a:ea typeface="Calibri" pitchFamily="34" charset="-122"/>
                 <a:cs typeface="Calibri" pitchFamily="34" charset="-120"/>
               </a:rPr>
-              <a:t>corrected CI  </a:t>
+              <a:t>corrected  </a:t>
             </a:r>
             <a:pPr indent="0" marL="0">
               <a:buNone/>
@@ -2843,7 +2932,7 @@
                 <a:ea typeface="Calibri" pitchFamily="34" charset="-122"/>
                 <a:cs typeface="Calibri" pitchFamily="34" charset="-120"/>
               </a:rPr>
-              <a:t>[−1.78, −1.06]</a:t>
+              <a:t>−1.65 → −1.62</a:t>
             </a:r>
             <a:endParaRPr lang="en-US" sz="1100" dirty="0"/>
           </a:p>
@@ -2914,7 +3003,7 @@
                 <a:ea typeface="Courier New" pitchFamily="34" charset="-122"/>
                 <a:cs typeface="Courier New" pitchFamily="34" charset="-120"/>
               </a:rPr>
-              <a:t>D·09 · ALGEBRA FIRST — WHAT MAC CAN AND CANNOT MOVE</a:t>
+              <a:t>C·08 · RESIDUAL STRUCTURE — RAW VS CORRECTED</a:t>
             </a:r>
             <a:endParaRPr lang="en-US" sz="1100" dirty="0"/>
           </a:p>
@@ -2953,7 +3042,7 @@
                 <a:ea typeface="Calibri" pitchFamily="34" charset="-122"/>
                 <a:cs typeface="Calibri" pitchFamily="34" charset="-120"/>
               </a:rPr>
-              <a:t>MAC cannot move any intercept — every calibration pivots; the fork is a slope contest.</a:t>
+              <a:t>The corrected model misses by a season-stable constant: −2.0 to −2.6 µg/m³.</a:t>
             </a:r>
             <a:endParaRPr lang="en-US" sz="2600" dirty="0"/>
           </a:p>
@@ -2993,7 +3082,7 @@
       </p:sp>
       <p:pic>
         <p:nvPicPr>
-          <p:cNvPr id="5" name="Image 0" descr="/Users/ahmadjalil/github/aethmodular/research/ftir_ec_phase3/output/plots/deck/by_protocol/site_held_out/mac_slope_pivot.png">    </p:cNvPr>
+          <p:cNvPr id="5" name="Image 0" descr="/private/tmp/claude-501/-Users-ahmadjalil-github-aethmodular/98af0981-a12c-4f18-82f4-663747dfdcd7/scratchpad/plates/residual_vs_d2_shp.png">    </p:cNvPr>
           <p:cNvPicPr>
             <a:picLocks noChangeAspect="1"/>
           </p:cNvPicPr>
@@ -3047,7 +3136,7 @@
                 <a:ea typeface="Courier New" pitchFamily="34" charset="-122"/>
                 <a:cs typeface="Courier New" pitchFamily="34" charset="-120"/>
               </a:rPr>
-              <a:t>ftir_19 · mac_slope_pivot   </a:t>
+              <a:t>ftir_15/22 · residual_vs_d2   </a:t>
             </a:r>
             <a:pPr indent="0" marL="0">
               <a:buNone/>
@@ -3061,7 +3150,7 @@
                 <a:ea typeface="Calibri" pitchFamily="34" charset="-122"/>
                 <a:cs typeface="Calibri" pitchFamily="34" charset="-120"/>
               </a:rPr>
-              <a:t>x = Fabs/MAC: intercept and R² exact, slope ×0.6 going 10 → 6</a:t>
+              <a:t>Residual vs Mahalanobis D² in score space; site-cluster bootstrap B = 200</a:t>
             </a:r>
             <a:endParaRPr lang="en-US" sz="850" dirty="0"/>
           </a:p>
@@ -3076,7 +3165,7 @@
         <p:spPr>
           <a:xfrm>
             <a:off x="502920" y="1737360"/>
-            <a:ext cx="3291840" cy="3474720"/>
+            <a:ext cx="3291840" cy="3931920"/>
           </a:xfrm>
           <a:prstGeom prst="rect">
             <a:avLst/>
@@ -3103,7 +3192,7 @@
                 <a:ea typeface="Calibri" pitchFamily="34" charset="-122"/>
                 <a:cs typeface="Calibri" pitchFamily="34" charset="-120"/>
               </a:rPr>
-              <a:t>Since x = Fabs/MAC, switching MAC rescales x by a constant: every setup keeps its intercept and R² exactly, and its slope scales by exactly 0.6.</a:t>
+              <a:t>The raw model's Addis error tracks extrapolation distance (r = 0.71) and flips sign by season — it fails by being out of domain.</a:t>
             </a:r>
             <a:endParaRPr lang="en-US" sz="1250" dirty="0"/>
           </a:p>
@@ -3123,10 +3212,30 @@
                 <a:ea typeface="Calibri" pitchFamily="34" charset="-122"/>
                 <a:cs typeface="Calibri" pitchFamily="34" charset="-120"/>
               </a:rPr>
-              <a:t>So the fork reduces to: MAC 6 makes the raw models self-consistent (lowest-OC/EC 0.95, Ethiopia-shaped 1.05, deployed 1.14); MAC 10 is where the corrected model lands closest (0.86). Fit statistics cannot choose between the branches.</a:t>
+              <a:t>The corrected model's error is D²-independent and flat in every season. Bootstrap: corrected intercept 95% CI [−1.78, −1.06] — excludes zero, disjoint from raw's [−4.88, −2.81].</a:t>
             </a:r>
             <a:endParaRPr lang="en-US" sz="1250" dirty="0"/>
           </a:p>
+          <a:p>
+            <a:pPr algn="l" indent="0" marL="0">
+              <a:spcAft>
+                <a:spcPts val="800"/>
+              </a:spcAft>
+              <a:buNone/>
+            </a:pPr>
+            <a:r>
+              <a:rPr lang="en-US" sz="1150" dirty="0">
+                <a:solidFill>
+                  <a:srgbClr val="5E6369"/>
+                </a:solidFill>
+                <a:latin typeface="Calibri" pitchFamily="34" charset="0"/>
+                <a:ea typeface="Calibri" pitchFamily="34" charset="-122"/>
+                <a:cs typeface="Calibri" pitchFamily="34" charset="-120"/>
+              </a:rPr>
+              <a:t>Estimator check (Ann's ask): headline fits are OLS; Deming with measured σ_x (HIPS_Uncertainty, λ* ≈ 2.96) moves the corrected intercept to −2.09 — errors-in-variables makes the offset larger, so OLS is the conservative bound.</a:t>
+            </a:r>
+            <a:endParaRPr lang="en-US" sz="1250" dirty="0"/>
+          </a:p>
         </p:txBody>
       </p:sp>
       <p:sp>
@@ -3137,7 +3246,7 @@
         </p:nvSpPr>
         <p:spPr>
           <a:xfrm>
-            <a:off x="502920" y="4846320"/>
+            <a:off x="502920" y="5074920"/>
             <a:ext cx="3246120" cy="402336"/>
           </a:xfrm>
           <a:prstGeom prst="roundRect">
@@ -3164,7 +3273,7 @@
         </p:nvSpPr>
         <p:spPr>
           <a:xfrm>
-            <a:off x="612648" y="4846320"/>
+            <a:off x="612648" y="5074920"/>
             <a:ext cx="3063240" cy="402336"/>
           </a:xfrm>
           <a:prstGeom prst="rect">
@@ -3189,7 +3298,7 @@
                 <a:ea typeface="Calibri" pitchFamily="34" charset="-122"/>
                 <a:cs typeface="Calibri" pitchFamily="34" charset="-120"/>
               </a:rPr>
-              <a:t>slope scaling  </a:t>
+              <a:t>raw: resid ~ D²  </a:t>
             </a:r>
             <a:pPr indent="0" marL="0">
               <a:buNone/>
@@ -3197,13 +3306,13 @@
             <a:r>
               <a:rPr lang="en-US" sz="1100" b="1" dirty="0">
                 <a:solidFill>
-                  <a:srgbClr val="5E6369"/>
-                </a:solidFill>
-                <a:latin typeface="Calibri" pitchFamily="34" charset="0"/>
-                <a:ea typeface="Calibri" pitchFamily="34" charset="-122"/>
-                <a:cs typeface="Calibri" pitchFamily="34" charset="-120"/>
-              </a:rPr>
-              <a:t>×0.6 exact</a:t>
+                  <a:srgbClr val="B23327"/>
+                </a:solidFill>
+                <a:latin typeface="Calibri" pitchFamily="34" charset="0"/>
+                <a:ea typeface="Calibri" pitchFamily="34" charset="-122"/>
+                <a:cs typeface="Calibri" pitchFamily="34" charset="-120"/>
+              </a:rPr>
+              <a:t>r = 0.71</a:t>
             </a:r>
             <a:endParaRPr lang="en-US" sz="1100" dirty="0"/>
           </a:p>
@@ -3217,7 +3326,7 @@
         </p:nvSpPr>
         <p:spPr>
           <a:xfrm>
-            <a:off x="502920" y="5358384"/>
+            <a:off x="502920" y="5586984"/>
             <a:ext cx="3246120" cy="402336"/>
           </a:xfrm>
           <a:prstGeom prst="roundRect">
@@ -3244,7 +3353,7 @@
         </p:nvSpPr>
         <p:spPr>
           <a:xfrm>
-            <a:off x="612648" y="5358384"/>
+            <a:off x="612648" y="5586984"/>
             <a:ext cx="3063240" cy="402336"/>
           </a:xfrm>
           <a:prstGeom prst="rect">
@@ -3269,7 +3378,7 @@
                 <a:ea typeface="Calibri" pitchFamily="34" charset="-122"/>
                 <a:cs typeface="Calibri" pitchFamily="34" charset="-120"/>
               </a:rPr>
-              <a:t>raw @ MAC 6  </a:t>
+              <a:t>corrected CI  </a:t>
             </a:r>
             <a:pPr indent="0" marL="0">
               <a:buNone/>
@@ -3277,13 +3386,13 @@
             <a:r>
               <a:rPr lang="en-US" sz="1100" b="1" dirty="0">
                 <a:solidFill>
-                  <a:srgbClr val="2C6E9E"/>
-                </a:solidFill>
-                <a:latin typeface="Calibri" pitchFamily="34" charset="0"/>
-                <a:ea typeface="Calibri" pitchFamily="34" charset="-122"/>
-                <a:cs typeface="Calibri" pitchFamily="34" charset="-120"/>
-              </a:rPr>
-              <a:t>0.95</a:t>
+                  <a:srgbClr val="3F7A56"/>
+                </a:solidFill>
+                <a:latin typeface="Calibri" pitchFamily="34" charset="0"/>
+                <a:ea typeface="Calibri" pitchFamily="34" charset="-122"/>
+                <a:cs typeface="Calibri" pitchFamily="34" charset="-120"/>
+              </a:rPr>
+              <a:t>[−1.78, −1.06]</a:t>
             </a:r>
             <a:endParaRPr lang="en-US" sz="1100" dirty="0"/>
           </a:p>
@@ -3297,7 +3406,7 @@
         </p:nvSpPr>
         <p:spPr>
           <a:xfrm>
-            <a:off x="502920" y="5870448"/>
+            <a:off x="502920" y="6099048"/>
             <a:ext cx="3246120" cy="402336"/>
           </a:xfrm>
           <a:prstGeom prst="roundRect">
@@ -3324,7 +3433,7 @@
         </p:nvSpPr>
         <p:spPr>
           <a:xfrm>
-            <a:off x="612648" y="5870448"/>
+            <a:off x="612648" y="6099048"/>
             <a:ext cx="3063240" cy="402336"/>
           </a:xfrm>
           <a:prstGeom prst="rect">
@@ -3349,7 +3458,7 @@
                 <a:ea typeface="Calibri" pitchFamily="34" charset="-122"/>
                 <a:cs typeface="Calibri" pitchFamily="34" charset="-120"/>
               </a:rPr>
-              <a:t>corrected @ MAC 10  </a:t>
+              <a:t>Deming λ*  </a:t>
             </a:r>
             <a:pPr indent="0" marL="0">
               <a:buNone/>
@@ -3357,13 +3466,13 @@
             <a:r>
               <a:rPr lang="en-US" sz="1100" b="1" dirty="0">
                 <a:solidFill>
-                  <a:srgbClr val="7A4FA3"/>
-                </a:solidFill>
-                <a:latin typeface="Calibri" pitchFamily="34" charset="0"/>
-                <a:ea typeface="Calibri" pitchFamily="34" charset="-122"/>
-                <a:cs typeface="Calibri" pitchFamily="34" charset="-120"/>
-              </a:rPr>
-              <a:t>0.86</a:t>
+                  <a:srgbClr val="2C6E9E"/>
+                </a:solidFill>
+                <a:latin typeface="Calibri" pitchFamily="34" charset="0"/>
+                <a:ea typeface="Calibri" pitchFamily="34" charset="-122"/>
+                <a:cs typeface="Calibri" pitchFamily="34" charset="-120"/>
+              </a:rPr>
+              <a:t>−1.62 → −2.09</a:t>
             </a:r>
             <a:endParaRPr lang="en-US" sz="1100" dirty="0"/>
           </a:p>
@@ -3434,7 +3543,7 @@
                 <a:ea typeface="Courier New" pitchFamily="34" charset="-122"/>
                 <a:cs typeface="Courier New" pitchFamily="34" charset="-120"/>
               </a:rPr>
-              <a:t>D·10 · THE BRIDGE — 151,843 IMPROVE FILTERS</a:t>
+              <a:t>D·09 · ALGEBRA FIRST — WHAT MAC CAN AND CANNOT MOVE</a:t>
             </a:r>
             <a:endParaRPr lang="en-US" sz="1100" dirty="0"/>
           </a:p>
@@ -3473,7 +3582,7 @@
                 <a:ea typeface="Calibri" pitchFamily="34" charset="-122"/>
                 <a:cs typeface="Calibri" pitchFamily="34" charset="-120"/>
               </a:rPr>
-              <a:t>At Addis-like composition, IMPROVE's implied MAC is 10.05 — at the confirmed 633 nm.</a:t>
+              <a:t>MAC cannot move any intercept — every calibration pivots; the fork is a slope contest.</a:t>
             </a:r>
             <a:endParaRPr lang="en-US" sz="2600" dirty="0"/>
           </a:p>
@@ -3513,7 +3622,7 @@
       </p:sp>
       <p:pic>
         <p:nvPicPr>
-          <p:cNvPr id="5" name="Image 0" descr="/Users/ahmadjalil/github/aethmodular/research/ftir_ec_phase3/output/plots/ftir16/improve_implied_mac_curve.png">    </p:cNvPr>
+          <p:cNvPr id="5" name="Image 0" descr="/private/tmp/claude-501/-Users-ahmadjalil-github-aethmodular/98af0981-a12c-4f18-82f4-663747dfdcd7/scratchpad/plates/mac_slope_pivot_shp.png">    </p:cNvPr>
           <p:cNvPicPr>
             <a:picLocks noChangeAspect="1"/>
           </p:cNvPicPr>
@@ -3567,7 +3676,7 @@
                 <a:ea typeface="Courier New" pitchFamily="34" charset="-122"/>
                 <a:cs typeface="Courier New" pitchFamily="34" charset="-120"/>
               </a:rPr>
-              <a:t>ftir_16 · improve_implied_mac_curve   </a:t>
+              <a:t>ftir_19 · mac_slope_pivot   </a:t>
             </a:r>
             <a:pPr indent="0" marL="0">
               <a:buNone/>
@@ -3581,7 +3690,7 @@
                 <a:ea typeface="Calibri" pitchFamily="34" charset="-122"/>
                 <a:cs typeface="Calibri" pitchFamily="34" charset="-120"/>
               </a:rPr>
-              <a:t>Implied MAC = HIPS Fabs / TOR EC, 151,843 matched filters, binned by OC/EC</a:t>
+              <a:t>x = Fabs/MAC: intercept and R² exact, slope ×0.6 going 10 → 6</a:t>
             </a:r>
             <a:endParaRPr lang="en-US" sz="850" dirty="0"/>
           </a:p>
@@ -3615,7 +3724,7 @@
               <a:buNone/>
             </a:pPr>
             <a:r>
-              <a:rPr lang="en-US" sz="1250" b="1" dirty="0">
+              <a:rPr lang="en-US" sz="1250" dirty="0">
                 <a:solidFill>
                   <a:srgbClr val="1A1D21"/>
                 </a:solidFill>
@@ -3623,7 +3732,7 @@
                 <a:ea typeface="Calibri" pitchFamily="34" charset="-122"/>
                 <a:cs typeface="Calibri" pitchFamily="34" charset="-120"/>
               </a:rPr>
-              <a:t>Where IMPROVE has both HIPS and TOR: implied MAC median 11.96 overall — and 10.05 in the Addis-like OC/EC ≤ 2.27 subset (n = 6,503). MAC 10 is centred at Addis-like composition; MAC 6 sits in the lower tail.</a:t>
+              <a:t>Since x = Fabs/MAC, switching MAC rescales x by a constant: every setup keeps its y-intercept and R² exactly, and its slope scales by exactly 0.6.</a:t>
             </a:r>
             <a:endParaRPr lang="en-US" sz="1250" dirty="0"/>
           </a:p>
@@ -3635,7 +3744,7 @@
               <a:buNone/>
             </a:pPr>
             <a:r>
-              <a:rPr lang="en-US" sz="1250" dirty="0">
+              <a:rPr lang="en-US" sz="1250" b="1" dirty="0">
                 <a:solidFill>
                   <a:srgbClr val="1A1D21"/>
                 </a:solidFill>
@@ -3643,7 +3752,7 @@
                 <a:ea typeface="Calibri" pitchFamily="34" charset="-122"/>
                 <a:cs typeface="Calibri" pitchFamily="34" charset="-120"/>
               </a:rPr>
-              <a:t>The high-OC/EC tail's inflated implied MAC (median 19.8) independently shows Fabs carries organic-scaling non-EC absorption.</a:t>
+              <a:t>So the fork reduces to: MAC 6 makes the raw models self-consistent (lowest-OC/EC 0.95, Ethiopia-shaped 1.05, deployed 1.14); MAC 10 is where the corrected model lands closest (0.86). Fit statistics cannot choose between the branches.</a:t>
             </a:r>
             <a:endParaRPr lang="en-US" sz="1250" dirty="0"/>
           </a:p>
@@ -3663,7 +3772,7 @@
                 <a:ea typeface="Calibri" pitchFamily="34" charset="-122"/>
                 <a:cs typeface="Calibri" pitchFamily="34" charset="-120"/>
               </a:rPr>
-              <a:t>Wavelength note: HIPS is confirmed He–Ne 632.8 ≈ 633 nm with MAC 10 defined at 633 (SPARTAN Instruments page; 2025 methods paper) — so this bridge and the MAC convention are on the same wavelength.</a:t>
+              <a:t>“Let the slope define MAC” (native MAC ≈ 5.3 for the deployed fit) is circular while FTIR-EC itself is in question — the non-circular route is the next slide.</a:t>
             </a:r>
             <a:endParaRPr lang="en-US" sz="1250" dirty="0"/>
           </a:p>
@@ -3729,7 +3838,7 @@
                 <a:ea typeface="Calibri" pitchFamily="34" charset="-122"/>
                 <a:cs typeface="Calibri" pitchFamily="34" charset="-120"/>
               </a:rPr>
-              <a:t>Addis-like subset  </a:t>
+              <a:t>slope scaling  </a:t>
             </a:r>
             <a:pPr indent="0" marL="0">
               <a:buNone/>
@@ -3737,13 +3846,13 @@
             <a:r>
               <a:rPr lang="en-US" sz="1100" b="1" dirty="0">
                 <a:solidFill>
-                  <a:srgbClr val="3F7A56"/>
-                </a:solidFill>
-                <a:latin typeface="Calibri" pitchFamily="34" charset="0"/>
-                <a:ea typeface="Calibri" pitchFamily="34" charset="-122"/>
-                <a:cs typeface="Calibri" pitchFamily="34" charset="-120"/>
-              </a:rPr>
-              <a:t>MAC 10.05</a:t>
+                  <a:srgbClr val="5E6369"/>
+                </a:solidFill>
+                <a:latin typeface="Calibri" pitchFamily="34" charset="0"/>
+                <a:ea typeface="Calibri" pitchFamily="34" charset="-122"/>
+                <a:cs typeface="Calibri" pitchFamily="34" charset="-120"/>
+              </a:rPr>
+              <a:t>×0.6 exact</a:t>
             </a:r>
             <a:endParaRPr lang="en-US" sz="1100" dirty="0"/>
           </a:p>
@@ -3809,7 +3918,7 @@
                 <a:ea typeface="Calibri" pitchFamily="34" charset="-122"/>
                 <a:cs typeface="Calibri" pitchFamily="34" charset="-120"/>
               </a:rPr>
-              <a:t>pool median  </a:t>
+              <a:t>raw @ MAC 6  </a:t>
             </a:r>
             <a:pPr indent="0" marL="0">
               <a:buNone/>
@@ -3823,7 +3932,7 @@
                 <a:ea typeface="Calibri" pitchFamily="34" charset="-122"/>
                 <a:cs typeface="Calibri" pitchFamily="34" charset="-120"/>
               </a:rPr>
-              <a:t>11.96</a:t>
+              <a:t>0.95</a:t>
             </a:r>
             <a:endParaRPr lang="en-US" sz="1100" dirty="0"/>
           </a:p>
@@ -3889,7 +3998,7 @@
                 <a:ea typeface="Calibri" pitchFamily="34" charset="-122"/>
                 <a:cs typeface="Calibri" pitchFamily="34" charset="-120"/>
               </a:rPr>
-              <a:t>high-OC/EC tail  </a:t>
+              <a:t>corrected @ MAC 10  </a:t>
             </a:r>
             <a:pPr indent="0" marL="0">
               <a:buNone/>
@@ -3897,13 +4006,13 @@
             <a:r>
               <a:rPr lang="en-US" sz="1100" b="1" dirty="0">
                 <a:solidFill>
-                  <a:srgbClr val="B23327"/>
-                </a:solidFill>
-                <a:latin typeface="Calibri" pitchFamily="34" charset="0"/>
-                <a:ea typeface="Calibri" pitchFamily="34" charset="-122"/>
-                <a:cs typeface="Calibri" pitchFamily="34" charset="-120"/>
-              </a:rPr>
-              <a:t>19.8</a:t>
+                  <a:srgbClr val="7A4FA3"/>
+                </a:solidFill>
+                <a:latin typeface="Calibri" pitchFamily="34" charset="0"/>
+                <a:ea typeface="Calibri" pitchFamily="34" charset="-122"/>
+                <a:cs typeface="Calibri" pitchFamily="34" charset="-120"/>
+              </a:rPr>
+              <a:t>0.86</a:t>
             </a:r>
             <a:endParaRPr lang="en-US" sz="1100" dirty="0"/>
           </a:p>
@@ -3974,7 +4083,7 @@
                 <a:ea typeface="Courier New" pitchFamily="34" charset="-122"/>
                 <a:cs typeface="Courier New" pitchFamily="34" charset="-120"/>
               </a:rPr>
-              <a:t>E·11 · THE ~1600 CM⁻¹ BAND</a:t>
+              <a:t>D·10 · THE BRIDGE — 151,843 IMPROVE FILTERS</a:t>
             </a:r>
             <a:endParaRPr lang="en-US" sz="1100" dirty="0"/>
           </a:p>
@@ -4013,7 +4122,7 @@
                 <a:ea typeface="Calibri" pitchFamily="34" charset="-122"/>
                 <a:cs typeface="Calibri" pitchFamily="34" charset="-120"/>
               </a:rPr>
-              <a:t>Not amine. Carboxylate and/or aromatic C=C — stuck below 1425 cm⁻¹ without your sub-1500 model.</a:t>
+              <a:t>At Addis-like composition, IMPROVE's implied MAC is 10.05 — at the confirmed 633 nm.</a:t>
             </a:r>
             <a:endParaRPr lang="en-US" sz="2600" dirty="0"/>
           </a:p>
@@ -4053,7 +4162,7 @@
       </p:sp>
       <p:pic>
         <p:nvPicPr>
-          <p:cNvPr id="5" name="Image 0" descr="/Users/ahmadjalil/github/aethmodular/research/ftir_ec_phase3/output/plots/ftir12/peak_center_1600_by_group.png">    </p:cNvPr>
+          <p:cNvPr id="5" name="Image 0" descr="/private/tmp/claude-501/-Users-ahmadjalil-github-aethmodular/98af0981-a12c-4f18-82f4-663747dfdcd7/scratchpad/plates/improve_implied_mac_curve.png">    </p:cNvPr>
           <p:cNvPicPr>
             <a:picLocks noChangeAspect="1"/>
           </p:cNvPicPr>
@@ -4107,7 +4216,7 @@
                 <a:ea typeface="Courier New" pitchFamily="34" charset="-122"/>
                 <a:cs typeface="Courier New" pitchFamily="34" charset="-120"/>
               </a:rPr>
-              <a:t>ftir_12 · peak_center_1600_by_group   </a:t>
+              <a:t>ftir_16 · improve_implied_mac_curve   </a:t>
             </a:r>
             <a:pPr indent="0" marL="0">
               <a:buNone/>
@@ -4121,7 +4230,7 @@
                 <a:ea typeface="Calibri" pitchFamily="34" charset="-122"/>
                 <a:cs typeface="Calibri" pitchFamily="34" charset="-120"/>
               </a:rPr>
-              <a:t>Peak centers under the edge-corrected window; unchanged on AIRSpec-corrected spectra</a:t>
+              <a:t>Implied MAC = HIPS Fabs / TOR EC, 151,843 matched filters, binned by OC/EC</a:t>
             </a:r>
             <a:endParaRPr lang="en-US" sz="850" dirty="0"/>
           </a:p>
@@ -4136,7 +4245,7 @@
         <p:spPr>
           <a:xfrm>
             <a:off x="502920" y="1737360"/>
-            <a:ext cx="3291840" cy="3840480"/>
+            <a:ext cx="3291840" cy="3931920"/>
           </a:xfrm>
           <a:prstGeom prst="rect">
             <a:avLst/>
@@ -4155,7 +4264,7 @@
               <a:buNone/>
             </a:pPr>
             <a:r>
-              <a:rPr lang="en-US" sz="1250" dirty="0">
+              <a:rPr lang="en-US" sz="1250" b="1" dirty="0">
                 <a:solidFill>
                   <a:srgbClr val="1A1D21"/>
                 </a:solidFill>
@@ -4163,7 +4272,7 @@
                 <a:ea typeface="Calibri" pitchFamily="34" charset="-122"/>
                 <a:cs typeface="Calibri" pitchFamily="34" charset="-120"/>
               </a:rPr>
-              <a:t>Addis peaks at 1617–1619 cm⁻¹ (IQR 1616–1620) in every season; every IMPROVE cohort sits ≥ 1633 with essentially no overlap.</a:t>
+              <a:t>Where IMPROVE has both HIPS and TOR: implied MAC median 11.96 overall — and 10.05 in the Addis-like OC/EC ≤ 2.27 subset (n = 6,503). MAC 10 is centred at Addis-like composition; MAC 6 sits in the lower tail.</a:t>
             </a:r>
             <a:endParaRPr lang="en-US" sz="1250" dirty="0"/>
           </a:p>
@@ -4175,7 +4284,7 @@
               <a:buNone/>
             </a:pPr>
             <a:r>
-              <a:rPr lang="en-US" sz="1250" b="1" dirty="0">
+              <a:rPr lang="en-US" sz="1250" dirty="0">
                 <a:solidFill>
                   <a:srgbClr val="1A1D21"/>
                 </a:solidFill>
@@ -4183,7 +4292,7 @@
                 <a:ea typeface="Calibri" pitchFamily="34" charset="-122"/>
                 <a:cs typeface="Calibri" pitchFamily="34" charset="-120"/>
               </a:rPr>
-              <a:t>Within Addis the band co-varies with CH (ρ = 0.88) and carbonyl (0.93) but not with the 3100–3400 N–H/O–H window (0.17) — an N–H bend without its stretch is implausible, so amine is out.</a:t>
+              <a:t>This is the non-circular version of “let the data set MAC” — TOR EC, not FTIR-EC, on the denominator.</a:t>
             </a:r>
             <a:endParaRPr lang="en-US" sz="1250" dirty="0"/>
           </a:p>
@@ -4195,15 +4304,15 @@
               <a:buNone/>
             </a:pPr>
             <a:r>
-              <a:rPr lang="en-US" sz="1250" dirty="0">
-                <a:solidFill>
-                  <a:srgbClr val="1A1D21"/>
-                </a:solidFill>
-                <a:latin typeface="Calibri" pitchFamily="34" charset="0"/>
-                <a:ea typeface="Calibri" pitchFamily="34" charset="-122"/>
-                <a:cs typeface="Calibri" pitchFamily="34" charset="-120"/>
-              </a:rPr>
-              <a:t>The remaining candidates — carboxylate COO⁻ and aromatic C=C — are both charcoal-consistent and cannot be separated on Teflon: the ~1400 symmetric partner is below AIRSpec's trusted range.</a:t>
+              <a:rPr lang="en-US" sz="1150" dirty="0">
+                <a:solidFill>
+                  <a:srgbClr val="5E6369"/>
+                </a:solidFill>
+                <a:latin typeface="Calibri" pitchFamily="34" charset="0"/>
+                <a:ea typeface="Calibri" pitchFamily="34" charset="-122"/>
+                <a:cs typeface="Calibri" pitchFamily="34" charset="-120"/>
+              </a:rPr>
+              <a:t>The high-OC/EC tail's inflated implied MAC (median 19.8) independently shows Fabs carries organic-scaling non-EC absorption. Wavelength: HIPS is confirmed He–Ne 632.8 ≈ 633 nm, MAC 10 defined at 633 — bridge and convention on the same wavelength.</a:t>
             </a:r>
             <a:endParaRPr lang="en-US" sz="1250" dirty="0"/>
           </a:p>
@@ -4217,7 +4326,7 @@
         </p:nvSpPr>
         <p:spPr>
           <a:xfrm>
-            <a:off x="502920" y="5074920"/>
+            <a:off x="502920" y="5257800"/>
             <a:ext cx="3246120" cy="402336"/>
           </a:xfrm>
           <a:prstGeom prst="roundRect">
@@ -4244,7 +4353,7 @@
         </p:nvSpPr>
         <p:spPr>
           <a:xfrm>
-            <a:off x="612648" y="5074920"/>
+            <a:off x="612648" y="5257800"/>
             <a:ext cx="3063240" cy="402336"/>
           </a:xfrm>
           <a:prstGeom prst="rect">
@@ -4269,7 +4378,7 @@
                 <a:ea typeface="Calibri" pitchFamily="34" charset="-122"/>
                 <a:cs typeface="Calibri" pitchFamily="34" charset="-120"/>
               </a:rPr>
-              <a:t>Addis center  </a:t>
+              <a:t>Addis-like subset  </a:t>
             </a:r>
             <a:pPr indent="0" marL="0">
               <a:buNone/>
@@ -4277,13 +4386,13 @@
             <a:r>
               <a:rPr lang="en-US" sz="1100" b="1" dirty="0">
                 <a:solidFill>
-                  <a:srgbClr val="B23327"/>
-                </a:solidFill>
-                <a:latin typeface="Calibri" pitchFamily="34" charset="0"/>
-                <a:ea typeface="Calibri" pitchFamily="34" charset="-122"/>
-                <a:cs typeface="Calibri" pitchFamily="34" charset="-120"/>
-              </a:rPr>
-              <a:t>1617–1619</a:t>
+                  <a:srgbClr val="3F7A56"/>
+                </a:solidFill>
+                <a:latin typeface="Calibri" pitchFamily="34" charset="0"/>
+                <a:ea typeface="Calibri" pitchFamily="34" charset="-122"/>
+                <a:cs typeface="Calibri" pitchFamily="34" charset="-120"/>
+              </a:rPr>
+              <a:t>MAC 10.05</a:t>
             </a:r>
             <a:endParaRPr lang="en-US" sz="1100" dirty="0"/>
           </a:p>
@@ -4297,7 +4406,7 @@
         </p:nvSpPr>
         <p:spPr>
           <a:xfrm>
-            <a:off x="502920" y="5586984"/>
+            <a:off x="502920" y="5769864"/>
             <a:ext cx="3246120" cy="402336"/>
           </a:xfrm>
           <a:prstGeom prst="roundRect">
@@ -4324,7 +4433,7 @@
         </p:nvSpPr>
         <p:spPr>
           <a:xfrm>
-            <a:off x="612648" y="5586984"/>
+            <a:off x="612648" y="5769864"/>
             <a:ext cx="3063240" cy="402336"/>
           </a:xfrm>
           <a:prstGeom prst="rect">
@@ -4349,7 +4458,7 @@
                 <a:ea typeface="Calibri" pitchFamily="34" charset="-122"/>
                 <a:cs typeface="Calibri" pitchFamily="34" charset="-120"/>
               </a:rPr>
-              <a:t>IMPROVE  </a:t>
+              <a:t>pool median  </a:t>
             </a:r>
             <a:pPr indent="0" marL="0">
               <a:buNone/>
@@ -4357,13 +4466,13 @@
             <a:r>
               <a:rPr lang="en-US" sz="1100" b="1" dirty="0">
                 <a:solidFill>
-                  <a:srgbClr val="5E6369"/>
-                </a:solidFill>
-                <a:latin typeface="Calibri" pitchFamily="34" charset="0"/>
-                <a:ea typeface="Calibri" pitchFamily="34" charset="-122"/>
-                <a:cs typeface="Calibri" pitchFamily="34" charset="-120"/>
-              </a:rPr>
-              <a:t>≥ 1633</a:t>
+                  <a:srgbClr val="2C6E9E"/>
+                </a:solidFill>
+                <a:latin typeface="Calibri" pitchFamily="34" charset="0"/>
+                <a:ea typeface="Calibri" pitchFamily="34" charset="-122"/>
+                <a:cs typeface="Calibri" pitchFamily="34" charset="-120"/>
+              </a:rPr>
+              <a:t>11.96</a:t>
             </a:r>
             <a:endParaRPr lang="en-US" sz="1100" dirty="0"/>
           </a:p>
@@ -4377,7 +4486,7 @@
         </p:nvSpPr>
         <p:spPr>
           <a:xfrm>
-            <a:off x="502920" y="6099048"/>
+            <a:off x="502920" y="6281928"/>
             <a:ext cx="3246120" cy="402336"/>
           </a:xfrm>
           <a:prstGeom prst="roundRect">
@@ -4404,7 +4513,7 @@
         </p:nvSpPr>
         <p:spPr>
           <a:xfrm>
-            <a:off x="612648" y="6099048"/>
+            <a:off x="612648" y="6281928"/>
             <a:ext cx="3063240" cy="402336"/>
           </a:xfrm>
           <a:prstGeom prst="rect">
@@ -4429,7 +4538,7 @@
                 <a:ea typeface="Calibri" pitchFamily="34" charset="-122"/>
                 <a:cs typeface="Calibri" pitchFamily="34" charset="-120"/>
               </a:rPr>
-              <a:t>ρ(1600, N–H)  </a:t>
+              <a:t>high-OC/EC tail  </a:t>
             </a:r>
             <a:pPr indent="0" marL="0">
               <a:buNone/>
@@ -4437,13 +4546,13 @@
             <a:r>
               <a:rPr lang="en-US" sz="1100" b="1" dirty="0">
                 <a:solidFill>
-                  <a:srgbClr val="2C6E9E"/>
-                </a:solidFill>
-                <a:latin typeface="Calibri" pitchFamily="34" charset="0"/>
-                <a:ea typeface="Calibri" pitchFamily="34" charset="-122"/>
-                <a:cs typeface="Calibri" pitchFamily="34" charset="-120"/>
-              </a:rPr>
-              <a:t>0.17</a:t>
+                  <a:srgbClr val="B23327"/>
+                </a:solidFill>
+                <a:latin typeface="Calibri" pitchFamily="34" charset="0"/>
+                <a:ea typeface="Calibri" pitchFamily="34" charset="-122"/>
+                <a:cs typeface="Calibri" pitchFamily="34" charset="-120"/>
+              </a:rPr>
+              <a:t>19.8</a:t>
             </a:r>
             <a:endParaRPr lang="en-US" sz="1100" dirty="0"/>
           </a:p>
@@ -4514,7 +4623,7 @@
                 <a:ea typeface="Courier New" pitchFamily="34" charset="-122"/>
                 <a:cs typeface="Courier New" pitchFamily="34" charset="-120"/>
               </a:rPr>
-              <a:t>E·12 · NAVEED'S SEASONS — AND THE NEXT NOTEBOOK</a:t>
+              <a:t>E·11 · THE ~1600 CM⁻¹ BAND</a:t>
             </a:r>
             <a:endParaRPr lang="en-US" sz="1100" dirty="0"/>
           </a:p>
@@ -4553,7 +4662,7 @@
                 <a:ea typeface="Calibri" pitchFamily="34" charset="-122"/>
                 <a:cs typeface="Calibri" pitchFamily="34" charset="-120"/>
               </a:rPr>
-              <a:t>Season changes loading, not shape — ftir_24 predicts dry and wet separately.</a:t>
+              <a:t>Not amine. Carboxylate and/or aromatic C=C — stuck below 1425 cm⁻¹ without your sub-1500 model.</a:t>
             </a:r>
             <a:endParaRPr lang="en-US" sz="2600" dirty="0"/>
           </a:p>
@@ -4593,7 +4702,7 @@
       </p:sp>
       <p:pic>
         <p:nvPicPr>
-          <p:cNvPr id="5" name="Image 0" descr="/Users/ahmadjalil/github/aethmodular/research/ftir_ec_phase3/output/plots/ftir17/addis_spectra_by_season.png">    </p:cNvPr>
+          <p:cNvPr id="5" name="Image 0" descr="/private/tmp/claude-501/-Users-ahmadjalil-github-aethmodular/98af0981-a12c-4f18-82f4-663747dfdcd7/scratchpad/plates/peak_center_1600_by_group.png">    </p:cNvPr>
           <p:cNvPicPr>
             <a:picLocks noChangeAspect="1"/>
           </p:cNvPicPr>
@@ -4647,7 +4756,7 @@
                 <a:ea typeface="Courier New" pitchFamily="34" charset="-122"/>
                 <a:cs typeface="Courier New" pitchFamily="34" charset="-120"/>
               </a:rPr>
-              <a:t>ftir_17 · addis_spectra_by_season   </a:t>
+              <a:t>ftir_12 · peak_center_1600_by_group   </a:t>
             </a:r>
             <a:pPr indent="0" marL="0">
               <a:buNone/>
@@ -4661,7 +4770,7 @@
                 <a:ea typeface="Calibri" pitchFamily="34" charset="-122"/>
                 <a:cs typeface="Calibri" pitchFamily="34" charset="-120"/>
               </a:rPr>
-              <a:t>Dry Oct–Feb / Belg Mar–May / Kiremt Jun–Sep</a:t>
+              <a:t>Peak centers under the edge-corrected window; unchanged on baseline-corrected spectra</a:t>
             </a:r>
             <a:endParaRPr lang="en-US" sz="850" dirty="0"/>
           </a:p>
@@ -4676,7 +4785,7 @@
         <p:spPr>
           <a:xfrm>
             <a:off x="502920" y="1737360"/>
-            <a:ext cx="3291840" cy="3657600"/>
+            <a:ext cx="3291840" cy="3840480"/>
           </a:xfrm>
           <a:prstGeom prst="rect">
             <a:avLst/>
@@ -4703,7 +4812,7 @@
                 <a:ea typeface="Calibri" pitchFamily="34" charset="-122"/>
                 <a:cs typeface="Calibri" pitchFamily="34" charset="-120"/>
               </a:rPr>
-              <a:t>All bands, deployed EC (3.3 → 7.2 µg/m³) and Fabs (43 → 56 Mm⁻¹) peak in Kiremt, while the 1600-band centre never moves; the one shape effect is relatively more broad O–H in the Dry season.</a:t>
+              <a:t>Addis peaks at 1617–1619 cm⁻¹ (IQR 1616–1620) in every season; every IMPROVE cohort sits ≥ 1633 with essentially no overlap.</a:t>
             </a:r>
             <a:endParaRPr lang="en-US" sz="1250" dirty="0"/>
           </a:p>
@@ -4723,10 +4832,30 @@
                 <a:ea typeface="Calibri" pitchFamily="34" charset="-122"/>
                 <a:cs typeface="Calibri" pitchFamily="34" charset="-120"/>
               </a:rPr>
-              <a:t>The committed residuals already show the season structure is a raw-model phenomenon (Dry −1.25 → Kiremt +0.49; corrected season-stable). ftir_24 will put per-season crossplots under the locked models with a season × x interaction design.</a:t>
+              <a:t>Within Addis the band co-varies with CH (ρ = 0.88) and carbonyl (0.93) but not with the 3100–3400 N–H/O–H window (0.17) — an N–H bend without its stretch is implausible, so amine is out.</a:t>
             </a:r>
             <a:endParaRPr lang="en-US" sz="1250" dirty="0"/>
           </a:p>
+          <a:p>
+            <a:pPr algn="l" indent="0" marL="0">
+              <a:spcAft>
+                <a:spcPts val="800"/>
+              </a:spcAft>
+              <a:buNone/>
+            </a:pPr>
+            <a:r>
+              <a:rPr lang="en-US" sz="1250" dirty="0">
+                <a:solidFill>
+                  <a:srgbClr val="1A1D21"/>
+                </a:solidFill>
+                <a:latin typeface="Calibri" pitchFamily="34" charset="0"/>
+                <a:ea typeface="Calibri" pitchFamily="34" charset="-122"/>
+                <a:cs typeface="Calibri" pitchFamily="34" charset="-120"/>
+              </a:rPr>
+              <a:t>The remaining candidates — carboxylate COO⁻ and aromatic C=C — are both charcoal-consistent and cannot be separated on Teflon: the ~1400 symmetric partner is below the trusted range.</a:t>
+            </a:r>
+            <a:endParaRPr lang="en-US" sz="1250" dirty="0"/>
+          </a:p>
         </p:txBody>
       </p:sp>
       <p:sp>
@@ -4737,7 +4866,7 @@
         </p:nvSpPr>
         <p:spPr>
           <a:xfrm>
-            <a:off x="502920" y="4846320"/>
+            <a:off x="502920" y="5257800"/>
             <a:ext cx="3246120" cy="402336"/>
           </a:xfrm>
           <a:prstGeom prst="roundRect">
@@ -4764,7 +4893,7 @@
         </p:nvSpPr>
         <p:spPr>
           <a:xfrm>
-            <a:off x="612648" y="4846320"/>
+            <a:off x="612648" y="5257800"/>
             <a:ext cx="3063240" cy="402336"/>
           </a:xfrm>
           <a:prstGeom prst="rect">
@@ -4789,7 +4918,7 @@
                 <a:ea typeface="Calibri" pitchFamily="34" charset="-122"/>
                 <a:cs typeface="Calibri" pitchFamily="34" charset="-120"/>
               </a:rPr>
-              <a:t>EC by season  </a:t>
+              <a:t>Addis center  </a:t>
             </a:r>
             <a:pPr indent="0" marL="0">
               <a:buNone/>
@@ -4797,13 +4926,13 @@
             <a:r>
               <a:rPr lang="en-US" sz="1100" b="1" dirty="0">
                 <a:solidFill>
-                  <a:srgbClr val="2C6E9E"/>
-                </a:solidFill>
-                <a:latin typeface="Calibri" pitchFamily="34" charset="0"/>
-                <a:ea typeface="Calibri" pitchFamily="34" charset="-122"/>
-                <a:cs typeface="Calibri" pitchFamily="34" charset="-120"/>
-              </a:rPr>
-              <a:t>3.3 → 7.2</a:t>
+                  <a:srgbClr val="B23327"/>
+                </a:solidFill>
+                <a:latin typeface="Calibri" pitchFamily="34" charset="0"/>
+                <a:ea typeface="Calibri" pitchFamily="34" charset="-122"/>
+                <a:cs typeface="Calibri" pitchFamily="34" charset="-120"/>
+              </a:rPr>
+              <a:t>1617–1619</a:t>
             </a:r>
             <a:endParaRPr lang="en-US" sz="1100" dirty="0"/>
           </a:p>
@@ -4817,7 +4946,7 @@
         </p:nvSpPr>
         <p:spPr>
           <a:xfrm>
-            <a:off x="502920" y="5358384"/>
+            <a:off x="502920" y="5769864"/>
             <a:ext cx="3246120" cy="402336"/>
           </a:xfrm>
           <a:prstGeom prst="roundRect">
@@ -4844,7 +4973,7 @@
         </p:nvSpPr>
         <p:spPr>
           <a:xfrm>
-            <a:off x="612648" y="5358384"/>
+            <a:off x="612648" y="5769864"/>
             <a:ext cx="3063240" cy="402336"/>
           </a:xfrm>
           <a:prstGeom prst="rect">
@@ -4869,7 +4998,7 @@
                 <a:ea typeface="Calibri" pitchFamily="34" charset="-122"/>
                 <a:cs typeface="Calibri" pitchFamily="34" charset="-120"/>
               </a:rPr>
-              <a:t>band centre  </a:t>
+              <a:t>IMPROVE  </a:t>
             </a:r>
             <a:pPr indent="0" marL="0">
               <a:buNone/>
@@ -4883,7 +5012,7 @@
                 <a:ea typeface="Calibri" pitchFamily="34" charset="-122"/>
                 <a:cs typeface="Calibri" pitchFamily="34" charset="-120"/>
               </a:rPr>
-              <a:t>fixed 1617–1619</a:t>
+              <a:t>≥ 1633</a:t>
             </a:r>
             <a:endParaRPr lang="en-US" sz="1100" dirty="0"/>
           </a:p>
@@ -4897,7 +5026,7 @@
         </p:nvSpPr>
         <p:spPr>
           <a:xfrm>
-            <a:off x="502920" y="5870448"/>
+            <a:off x="502920" y="6281928"/>
             <a:ext cx="3246120" cy="402336"/>
           </a:xfrm>
           <a:prstGeom prst="roundRect">
@@ -4924,7 +5053,7 @@
         </p:nvSpPr>
         <p:spPr>
           <a:xfrm>
-            <a:off x="612648" y="5870448"/>
+            <a:off x="612648" y="6281928"/>
             <a:ext cx="3063240" cy="402336"/>
           </a:xfrm>
           <a:prstGeom prst="rect">
@@ -4949,7 +5078,7 @@
                 <a:ea typeface="Calibri" pitchFamily="34" charset="-122"/>
                 <a:cs typeface="Calibri" pitchFamily="34" charset="-120"/>
               </a:rPr>
-              <a:t>eval split  </a:t>
+              <a:t>ρ(1600, N–H)  </a:t>
             </a:r>
             <a:pPr indent="0" marL="0">
               <a:buNone/>
@@ -4957,13 +5086,13 @@
             <a:r>
               <a:rPr lang="en-US" sz="1100" b="1" dirty="0">
                 <a:solidFill>
-                  <a:srgbClr val="3F7A56"/>
-                </a:solidFill>
-                <a:latin typeface="Calibri" pitchFamily="34" charset="0"/>
-                <a:ea typeface="Calibri" pitchFamily="34" charset="-122"/>
-                <a:cs typeface="Calibri" pitchFamily="34" charset="-120"/>
-              </a:rPr>
-              <a:t>105 / 61 / 73</a:t>
+                  <a:srgbClr val="2C6E9E"/>
+                </a:solidFill>
+                <a:latin typeface="Calibri" pitchFamily="34" charset="0"/>
+                <a:ea typeface="Calibri" pitchFamily="34" charset="-122"/>
+                <a:cs typeface="Calibri" pitchFamily="34" charset="-120"/>
+              </a:rPr>
+              <a:t>0.17</a:t>
             </a:r>
             <a:endParaRPr lang="en-US" sz="1100" dirty="0"/>
           </a:p>
@@ -5034,7 +5163,7 @@
                 <a:ea typeface="Courier New" pitchFamily="34" charset="-122"/>
                 <a:cs typeface="Courier New" pitchFamily="34" charset="-120"/>
               </a:rPr>
-              <a:t>E·13 · ADAMA &amp; BISHOFTU — THE UNCOMFORTABLE CHECK AND THE FREE TEST SET</a:t>
+              <a:t>E·12 · NAVEED'S SEASONS — AND THE NEXT NOTEBOOK</a:t>
             </a:r>
             <a:endParaRPr lang="en-US" sz="1100" dirty="0"/>
           </a:p>
@@ -5073,7 +5202,7 @@
                 <a:ea typeface="Calibri" pitchFamily="34" charset="-122"/>
                 <a:cs typeface="Calibri" pitchFamily="34" charset="-120"/>
               </a:rPr>
-              <a:t>The one same-corridor TOR we have looks ordinary — and a second Ethiopian site sits unused.</a:t>
+              <a:t>Season changes loading, not shape — ftir_24 predicts dry and wet separately.</a:t>
             </a:r>
             <a:endParaRPr lang="en-US" sz="2600" dirty="0"/>
           </a:p>
@@ -5113,7 +5242,7 @@
       </p:sp>
       <p:pic>
         <p:nvPicPr>
-          <p:cNvPr id="5" name="Image 0" descr="/Users/ahmadjalil/github/aethmodular/research/ftir_ec_phase3/output/plots/context/adama_etbi_context.png">    </p:cNvPr>
+          <p:cNvPr id="5" name="Image 0" descr="/private/tmp/claude-501/-Users-ahmadjalil-github-aethmodular/98af0981-a12c-4f18-82f4-663747dfdcd7/scratchpad/plates/addis_spectra_by_season.png">    </p:cNvPr>
           <p:cNvPicPr>
             <a:picLocks noChangeAspect="1"/>
           </p:cNvPicPr>
@@ -5167,7 +5296,7 @@
                 <a:ea typeface="Courier New" pitchFamily="34" charset="-122"/>
                 <a:cs typeface="Courier New" pitchFamily="34" charset="-120"/>
               </a:rPr>
-              <a:t>context · adama_etbi_context   </a:t>
+              <a:t>ftir_17 · addis_spectra_by_season   </a:t>
             </a:r>
             <a:pPr indent="0" marL="0">
               <a:buNone/>
@@ -5181,7 +5310,7 @@
                 <a:ea typeface="Calibri" pitchFamily="34" charset="-122"/>
                 <a:cs typeface="Calibri" pitchFamily="34" charset="-120"/>
               </a:rPr>
-              <a:t>Adama Batch-54: 5 quartz filters, July 2024 · ETBI: 32 filters Oct–Dec 2025, 26 with HIPS</a:t>
+              <a:t>Dry Oct–Feb / Belg Mar–May / Kiremt Jun–Sep</a:t>
             </a:r>
             <a:endParaRPr lang="en-US" sz="850" dirty="0"/>
           </a:p>
@@ -5223,7 +5352,7 @@
                 <a:ea typeface="Calibri" pitchFamily="34" charset="-122"/>
                 <a:cs typeface="Calibri" pitchFamily="34" charset="-120"/>
               </a:rPr>
-              <a:t>Adama TOR gives OC/EC 4.6–7.2 — right at the IMPROVE median, not the extreme tail the Addis offset implies regionally. Reconciling Addis HIPS with FTIR OC at Adama-like composition would need MAC ≈ 47 m²/g — unphysical — so something has to give.</a:t>
+              <a:t>All bands, deployed EC (3.3 → 7.2 µg/m³) and Fabs (43 → 56 Mm⁻¹) peak in Kiremt, while the 1600-band centre never moves; the one shape effect is relatively more broad O–H in the Dry season.</a:t>
             </a:r>
             <a:endParaRPr lang="en-US" sz="1250" dirty="0"/>
           </a:p>
@@ -5243,7 +5372,7 @@
                 <a:ea typeface="Calibri" pitchFamily="34" charset="-122"/>
                 <a:cs typeface="Calibri" pitchFamily="34" charset="-120"/>
               </a:rPr>
-              <a:t>ETBI (Bishoftu, median Fabs 26.9 Mm⁻¹ vs Addis Dry-season 43.2) is an untouched in-country test set for every conclusion here — if its spectra come through in the same pull as INDH/CHTS.</a:t>
+              <a:t>The committed residuals already show the season structure is a raw-model phenomenon (Dry −1.25 → Kiremt +0.49; corrected season-stable). ftir_24 will put per-season crossplots under the locked models with a season × x interaction design.</a:t>
             </a:r>
             <a:endParaRPr lang="en-US" sz="1250" dirty="0"/>
           </a:p>
@@ -5257,7 +5386,7 @@
         </p:nvSpPr>
         <p:spPr>
           <a:xfrm>
-            <a:off x="502920" y="4846320"/>
+            <a:off x="502920" y="5074920"/>
             <a:ext cx="3246120" cy="402336"/>
           </a:xfrm>
           <a:prstGeom prst="roundRect">
@@ -5284,7 +5413,7 @@
         </p:nvSpPr>
         <p:spPr>
           <a:xfrm>
-            <a:off x="612648" y="4846320"/>
+            <a:off x="612648" y="5074920"/>
             <a:ext cx="3063240" cy="402336"/>
           </a:xfrm>
           <a:prstGeom prst="rect">
@@ -5309,7 +5438,7 @@
                 <a:ea typeface="Calibri" pitchFamily="34" charset="-122"/>
                 <a:cs typeface="Calibri" pitchFamily="34" charset="-120"/>
               </a:rPr>
-              <a:t>Adama OC/EC  </a:t>
+              <a:t>EC by season  </a:t>
             </a:r>
             <a:pPr indent="0" marL="0">
               <a:buNone/>
@@ -5317,13 +5446,13 @@
             <a:r>
               <a:rPr lang="en-US" sz="1100" b="1" dirty="0">
                 <a:solidFill>
-                  <a:srgbClr val="5E6369"/>
-                </a:solidFill>
-                <a:latin typeface="Calibri" pitchFamily="34" charset="0"/>
-                <a:ea typeface="Calibri" pitchFamily="34" charset="-122"/>
-                <a:cs typeface="Calibri" pitchFamily="34" charset="-120"/>
-              </a:rPr>
-              <a:t>4.6–7.2</a:t>
+                  <a:srgbClr val="2C6E9E"/>
+                </a:solidFill>
+                <a:latin typeface="Calibri" pitchFamily="34" charset="0"/>
+                <a:ea typeface="Calibri" pitchFamily="34" charset="-122"/>
+                <a:cs typeface="Calibri" pitchFamily="34" charset="-120"/>
+              </a:rPr>
+              <a:t>3.3 → 7.2</a:t>
             </a:r>
             <a:endParaRPr lang="en-US" sz="1100" dirty="0"/>
           </a:p>
@@ -5337,7 +5466,7 @@
         </p:nvSpPr>
         <p:spPr>
           <a:xfrm>
-            <a:off x="502920" y="5358384"/>
+            <a:off x="502920" y="5586984"/>
             <a:ext cx="3246120" cy="402336"/>
           </a:xfrm>
           <a:prstGeom prst="roundRect">
@@ -5364,7 +5493,7 @@
         </p:nvSpPr>
         <p:spPr>
           <a:xfrm>
-            <a:off x="612648" y="5358384"/>
+            <a:off x="612648" y="5586984"/>
             <a:ext cx="3063240" cy="402336"/>
           </a:xfrm>
           <a:prstGeom prst="rect">
@@ -5389,7 +5518,7 @@
                 <a:ea typeface="Calibri" pitchFamily="34" charset="-122"/>
                 <a:cs typeface="Calibri" pitchFamily="34" charset="-120"/>
               </a:rPr>
-              <a:t>bridge MAC  </a:t>
+              <a:t>band centre  </a:t>
             </a:r>
             <a:pPr indent="0" marL="0">
               <a:buNone/>
@@ -5397,13 +5526,13 @@
             <a:r>
               <a:rPr lang="en-US" sz="1100" b="1" dirty="0">
                 <a:solidFill>
-                  <a:srgbClr val="B23327"/>
-                </a:solidFill>
-                <a:latin typeface="Calibri" pitchFamily="34" charset="0"/>
-                <a:ea typeface="Calibri" pitchFamily="34" charset="-122"/>
-                <a:cs typeface="Calibri" pitchFamily="34" charset="-120"/>
-              </a:rPr>
-              <a:t>≈ 47 m²/g</a:t>
+                  <a:srgbClr val="5E6369"/>
+                </a:solidFill>
+                <a:latin typeface="Calibri" pitchFamily="34" charset="0"/>
+                <a:ea typeface="Calibri" pitchFamily="34" charset="-122"/>
+                <a:cs typeface="Calibri" pitchFamily="34" charset="-120"/>
+              </a:rPr>
+              <a:t>fixed 1617–1619</a:t>
             </a:r>
             <a:endParaRPr lang="en-US" sz="1100" dirty="0"/>
           </a:p>
@@ -5417,7 +5546,7 @@
         </p:nvSpPr>
         <p:spPr>
           <a:xfrm>
-            <a:off x="502920" y="5870448"/>
+            <a:off x="502920" y="6099048"/>
             <a:ext cx="3246120" cy="402336"/>
           </a:xfrm>
           <a:prstGeom prst="roundRect">
@@ -5444,7 +5573,7 @@
         </p:nvSpPr>
         <p:spPr>
           <a:xfrm>
-            <a:off x="612648" y="5870448"/>
+            <a:off x="612648" y="6099048"/>
             <a:ext cx="3063240" cy="402336"/>
           </a:xfrm>
           <a:prstGeom prst="rect">
@@ -5469,7 +5598,7 @@
                 <a:ea typeface="Calibri" pitchFamily="34" charset="-122"/>
                 <a:cs typeface="Calibri" pitchFamily="34" charset="-120"/>
               </a:rPr>
-              <a:t>ETBI HIPS filters  </a:t>
+              <a:t>eval split  </a:t>
             </a:r>
             <a:pPr indent="0" marL="0">
               <a:buNone/>
@@ -5477,13 +5606,13 @@
             <a:r>
               <a:rPr lang="en-US" sz="1100" b="1" dirty="0">
                 <a:solidFill>
-                  <a:srgbClr val="2C6E9E"/>
-                </a:solidFill>
-                <a:latin typeface="Calibri" pitchFamily="34" charset="0"/>
-                <a:ea typeface="Calibri" pitchFamily="34" charset="-122"/>
-                <a:cs typeface="Calibri" pitchFamily="34" charset="-120"/>
-              </a:rPr>
-              <a:t>26, unused</a:t>
+                  <a:srgbClr val="3F7A56"/>
+                </a:solidFill>
+                <a:latin typeface="Calibri" pitchFamily="34" charset="0"/>
+                <a:ea typeface="Calibri" pitchFamily="34" charset="-122"/>
+                <a:cs typeface="Calibri" pitchFamily="34" charset="-120"/>
+              </a:rPr>
+              <a:t>105 / 61 / 73</a:t>
             </a:r>
             <a:endParaRPr lang="en-US" sz="1100" dirty="0"/>
           </a:p>
@@ -5500,6 +5629,526 @@
 <file path=ppt/slides/slide16.xml><?xml version="1.0" encoding="utf-8"?>
 <p:sld xmlns:a="http://schemas.openxmlformats.org/drawingml/2006/main" xmlns:r="http://schemas.openxmlformats.org/officeDocument/2006/relationships" xmlns:p="http://schemas.openxmlformats.org/presentationml/2006/main">
   <p:cSld name="Slide 16">
+    <p:bg>
+      <p:bgPr>
+        <a:solidFill>
+          <a:srgbClr val="FFFFFF"/>
+        </a:solidFill>
+      </p:bgPr>
+    </p:bg>
+    <p:spTree>
+      <p:nvGrpSpPr>
+        <p:cNvPr id="1" name=""/>
+        <p:cNvGrpSpPr/>
+        <p:nvPr/>
+      </p:nvGrpSpPr>
+      <p:grpSpPr>
+        <a:xfrm>
+          <a:off x="0" y="0"/>
+          <a:ext cx="0" cy="0"/>
+          <a:chOff x="0" y="0"/>
+          <a:chExt cx="0" cy="0"/>
+        </a:xfrm>
+      </p:grpSpPr>
+      <p:sp>
+        <p:nvSpPr>
+          <p:cNvPr id="2" name="Text 0"/>
+          <p:cNvSpPr/>
+          <p:nvPr/>
+        </p:nvSpPr>
+        <p:spPr>
+          <a:xfrm>
+            <a:off x="502920" y="292608"/>
+            <a:ext cx="11183112" cy="274320"/>
+          </a:xfrm>
+          <a:prstGeom prst="rect">
+            <a:avLst/>
+          </a:prstGeom>
+          <a:noFill/>
+          <a:ln/>
+        </p:spPr>
+        <p:txBody>
+          <a:bodyPr wrap="square" lIns="0" tIns="0" rIns="0" bIns="0" rtlCol="0" anchor="ctr"/>
+          <a:lstStyle/>
+          <a:p>
+            <a:pPr indent="0" marL="0">
+              <a:buNone/>
+            </a:pPr>
+            <a:r>
+              <a:rPr lang="en-US" sz="1100" spc="200" kern="0" dirty="0">
+                <a:solidFill>
+                  <a:srgbClr val="B23327"/>
+                </a:solidFill>
+                <a:latin typeface="Courier New" pitchFamily="34" charset="0"/>
+                <a:ea typeface="Courier New" pitchFamily="34" charset="-122"/>
+                <a:cs typeface="Courier New" pitchFamily="34" charset="-120"/>
+              </a:rPr>
+              <a:t>E·13 · ADAMA &amp; BISHOFTU — THE UNCOMFORTABLE CHECK AND THE FREE TEST SET</a:t>
+            </a:r>
+            <a:endParaRPr lang="en-US" sz="1100" dirty="0"/>
+          </a:p>
+        </p:txBody>
+      </p:sp>
+      <p:sp>
+        <p:nvSpPr>
+          <p:cNvPr id="3" name="Text 1"/>
+          <p:cNvSpPr/>
+          <p:nvPr/>
+        </p:nvSpPr>
+        <p:spPr>
+          <a:xfrm>
+            <a:off x="502920" y="566928"/>
+            <a:ext cx="11183112" cy="868680"/>
+          </a:xfrm>
+          <a:prstGeom prst="rect">
+            <a:avLst/>
+          </a:prstGeom>
+          <a:noFill/>
+          <a:ln/>
+        </p:spPr>
+        <p:txBody>
+          <a:bodyPr wrap="square" lIns="0" tIns="0" rIns="0" bIns="0" rtlCol="0" anchor="t"/>
+          <a:lstStyle/>
+          <a:p>
+            <a:pPr indent="0" marL="0">
+              <a:buNone/>
+            </a:pPr>
+            <a:r>
+              <a:rPr lang="en-US" sz="2600" b="1" dirty="0">
+                <a:solidFill>
+                  <a:srgbClr val="1A1D21"/>
+                </a:solidFill>
+                <a:latin typeface="Calibri" pitchFamily="34" charset="0"/>
+                <a:ea typeface="Calibri" pitchFamily="34" charset="-122"/>
+                <a:cs typeface="Calibri" pitchFamily="34" charset="-120"/>
+              </a:rPr>
+              <a:t>The one same-corridor TOR we have looks ordinary — and a second Ethiopian site sits unused.</a:t>
+            </a:r>
+            <a:endParaRPr lang="en-US" sz="2600" dirty="0"/>
+          </a:p>
+        </p:txBody>
+      </p:sp>
+      <p:sp>
+        <p:nvSpPr>
+          <p:cNvPr id="4" name="Shape 2"/>
+          <p:cNvSpPr/>
+          <p:nvPr/>
+        </p:nvSpPr>
+        <p:spPr>
+          <a:xfrm>
+            <a:off x="4023360" y="1554480"/>
+            <a:ext cx="7680960" cy="4773168"/>
+          </a:xfrm>
+          <a:prstGeom prst="rect">
+            <a:avLst/>
+          </a:prstGeom>
+          <a:solidFill>
+            <a:srgbClr val="FFFFFF"/>
+          </a:solidFill>
+          <a:ln w="12700">
+            <a:solidFill>
+              <a:srgbClr val="DDE0DC"/>
+            </a:solidFill>
+            <a:prstDash val="solid"/>
+          </a:ln>
+          <a:effectLst>
+            <a:outerShdw sx="100000" sy="100000" kx="0" ky="0" algn="bl" rotWithShape="0" blurRad="76200" dist="25400" dir="5400000">
+              <a:srgbClr val="000000">
+                <a:alpha val="18000"/>
+              </a:srgbClr>
+            </a:outerShdw>
+          </a:effectLst>
+        </p:spPr>
+      </p:sp>
+      <p:pic>
+        <p:nvPicPr>
+          <p:cNvPr id="5" name="Image 0" descr="/private/tmp/claude-501/-Users-ahmadjalil-github-aethmodular/98af0981-a12c-4f18-82f4-663747dfdcd7/scratchpad/plates/adama_etbi_context.png">    </p:cNvPr>
+          <p:cNvPicPr>
+            <a:picLocks noChangeAspect="1"/>
+          </p:cNvPicPr>
+          <p:nvPr/>
+        </p:nvPicPr>
+        <p:blipFill>
+          <a:blip r:embed="rId1"/>
+          <a:srcRect l="0" r="0" t="0" b="0"/>
+          <a:stretch/>
+        </p:blipFill>
+        <p:spPr>
+          <a:xfrm>
+            <a:off x="4078224" y="1609344"/>
+            <a:ext cx="7571232" cy="4370832"/>
+          </a:xfrm>
+          <a:prstGeom prst="rect">
+            <a:avLst/>
+          </a:prstGeom>
+        </p:spPr>
+      </p:pic>
+      <p:sp>
+        <p:nvSpPr>
+          <p:cNvPr id="6" name="Text 3"/>
+          <p:cNvSpPr/>
+          <p:nvPr/>
+        </p:nvSpPr>
+        <p:spPr>
+          <a:xfrm>
+            <a:off x="4114800" y="6016752"/>
+            <a:ext cx="7498080" cy="292608"/>
+          </a:xfrm>
+          <a:prstGeom prst="rect">
+            <a:avLst/>
+          </a:prstGeom>
+          <a:noFill/>
+          <a:ln/>
+        </p:spPr>
+        <p:txBody>
+          <a:bodyPr wrap="square" lIns="0" tIns="0" rIns="0" bIns="0" rtlCol="0" anchor="ctr"/>
+          <a:lstStyle/>
+          <a:p>
+            <a:pPr indent="0" marL="0">
+              <a:buNone/>
+            </a:pPr>
+            <a:r>
+              <a:rPr lang="en-US" sz="850" dirty="0">
+                <a:solidFill>
+                  <a:srgbClr val="8A9098"/>
+                </a:solidFill>
+                <a:latin typeface="Courier New" pitchFamily="34" charset="0"/>
+                <a:ea typeface="Courier New" pitchFamily="34" charset="-122"/>
+                <a:cs typeface="Courier New" pitchFamily="34" charset="-120"/>
+              </a:rPr>
+              <a:t>context · adama_etbi_context   </a:t>
+            </a:r>
+            <a:pPr indent="0" marL="0">
+              <a:buNone/>
+            </a:pPr>
+            <a:r>
+              <a:rPr lang="en-US" sz="950" i="1" dirty="0">
+                <a:solidFill>
+                  <a:srgbClr val="5E6369"/>
+                </a:solidFill>
+                <a:latin typeface="Calibri" pitchFamily="34" charset="0"/>
+                <a:ea typeface="Calibri" pitchFamily="34" charset="-122"/>
+                <a:cs typeface="Calibri" pitchFamily="34" charset="-120"/>
+              </a:rPr>
+              <a:t>Adama Batch-54: 5 quartz filters, July 2024 · ETBI: 32 filters Oct–Dec 2025, 26 with HIPS</a:t>
+            </a:r>
+            <a:endParaRPr lang="en-US" sz="850" dirty="0"/>
+          </a:p>
+        </p:txBody>
+      </p:sp>
+      <p:sp>
+        <p:nvSpPr>
+          <p:cNvPr id="7" name="Text 4"/>
+          <p:cNvSpPr/>
+          <p:nvPr/>
+        </p:nvSpPr>
+        <p:spPr>
+          <a:xfrm>
+            <a:off x="502920" y="1737360"/>
+            <a:ext cx="3291840" cy="3657600"/>
+          </a:xfrm>
+          <a:prstGeom prst="rect">
+            <a:avLst/>
+          </a:prstGeom>
+          <a:noFill/>
+          <a:ln/>
+        </p:spPr>
+        <p:txBody>
+          <a:bodyPr wrap="square" lIns="0" tIns="0" rIns="0" bIns="0" rtlCol="0" anchor="t"/>
+          <a:lstStyle/>
+          <a:p>
+            <a:pPr algn="l" indent="0" marL="0">
+              <a:spcAft>
+                <a:spcPts val="800"/>
+              </a:spcAft>
+              <a:buNone/>
+            </a:pPr>
+            <a:r>
+              <a:rPr lang="en-US" sz="1250" dirty="0">
+                <a:solidFill>
+                  <a:srgbClr val="1A1D21"/>
+                </a:solidFill>
+                <a:latin typeface="Calibri" pitchFamily="34" charset="0"/>
+                <a:ea typeface="Calibri" pitchFamily="34" charset="-122"/>
+                <a:cs typeface="Calibri" pitchFamily="34" charset="-120"/>
+              </a:rPr>
+              <a:t>Adama TOR gives OC/EC 4.6–7.2 — right at the IMPROVE median, not the extreme tail the Addis offset implies regionally. Reconciling Addis HIPS with FTIR OC at Adama-like composition would need MAC ≈ 47 m²/g — unphysical — so something has to give.</a:t>
+            </a:r>
+            <a:endParaRPr lang="en-US" sz="1250" dirty="0"/>
+          </a:p>
+          <a:p>
+            <a:pPr algn="l" indent="0" marL="0">
+              <a:spcAft>
+                <a:spcPts val="800"/>
+              </a:spcAft>
+              <a:buNone/>
+            </a:pPr>
+            <a:r>
+              <a:rPr lang="en-US" sz="1250" b="1" dirty="0">
+                <a:solidFill>
+                  <a:srgbClr val="1A1D21"/>
+                </a:solidFill>
+                <a:latin typeface="Calibri" pitchFamily="34" charset="0"/>
+                <a:ea typeface="Calibri" pitchFamily="34" charset="-122"/>
+                <a:cs typeface="Calibri" pitchFamily="34" charset="-120"/>
+              </a:rPr>
+              <a:t>ETBI (Bishoftu, median Fabs 26.9 Mm⁻¹ vs Addis Dry-season 43.2) is an untouched in-country test set for every conclusion here — if its spectra come through in the same pull as INDH/CHTS.</a:t>
+            </a:r>
+            <a:endParaRPr lang="en-US" sz="1250" dirty="0"/>
+          </a:p>
+        </p:txBody>
+      </p:sp>
+      <p:sp>
+        <p:nvSpPr>
+          <p:cNvPr id="8" name="Shape 5"/>
+          <p:cNvSpPr/>
+          <p:nvPr/>
+        </p:nvSpPr>
+        <p:spPr>
+          <a:xfrm>
+            <a:off x="502920" y="5074920"/>
+            <a:ext cx="3246120" cy="402336"/>
+          </a:xfrm>
+          <a:prstGeom prst="roundRect">
+            <a:avLst>
+              <a:gd name="adj" fmla="val 13636"/>
+            </a:avLst>
+          </a:prstGeom>
+          <a:solidFill>
+            <a:srgbClr val="F4F5F3"/>
+          </a:solidFill>
+          <a:ln w="9525">
+            <a:solidFill>
+              <a:srgbClr val="DDE0DC"/>
+            </a:solidFill>
+            <a:prstDash val="solid"/>
+          </a:ln>
+        </p:spPr>
+      </p:sp>
+      <p:sp>
+        <p:nvSpPr>
+          <p:cNvPr id="9" name="Text 6"/>
+          <p:cNvSpPr/>
+          <p:nvPr/>
+        </p:nvSpPr>
+        <p:spPr>
+          <a:xfrm>
+            <a:off x="612648" y="5074920"/>
+            <a:ext cx="3063240" cy="402336"/>
+          </a:xfrm>
+          <a:prstGeom prst="rect">
+            <a:avLst/>
+          </a:prstGeom>
+          <a:noFill/>
+          <a:ln/>
+        </p:spPr>
+        <p:txBody>
+          <a:bodyPr wrap="square" lIns="0" tIns="0" rIns="0" bIns="0" rtlCol="0" anchor="ctr"/>
+          <a:lstStyle/>
+          <a:p>
+            <a:pPr indent="0" marL="0">
+              <a:buNone/>
+            </a:pPr>
+            <a:r>
+              <a:rPr lang="en-US" sz="1100" dirty="0">
+                <a:solidFill>
+                  <a:srgbClr val="5E6369"/>
+                </a:solidFill>
+                <a:latin typeface="Calibri" pitchFamily="34" charset="0"/>
+                <a:ea typeface="Calibri" pitchFamily="34" charset="-122"/>
+                <a:cs typeface="Calibri" pitchFamily="34" charset="-120"/>
+              </a:rPr>
+              <a:t>Adama OC/EC  </a:t>
+            </a:r>
+            <a:pPr indent="0" marL="0">
+              <a:buNone/>
+            </a:pPr>
+            <a:r>
+              <a:rPr lang="en-US" sz="1100" b="1" dirty="0">
+                <a:solidFill>
+                  <a:srgbClr val="5E6369"/>
+                </a:solidFill>
+                <a:latin typeface="Calibri" pitchFamily="34" charset="0"/>
+                <a:ea typeface="Calibri" pitchFamily="34" charset="-122"/>
+                <a:cs typeface="Calibri" pitchFamily="34" charset="-120"/>
+              </a:rPr>
+              <a:t>4.6–7.2</a:t>
+            </a:r>
+            <a:endParaRPr lang="en-US" sz="1100" dirty="0"/>
+          </a:p>
+        </p:txBody>
+      </p:sp>
+      <p:sp>
+        <p:nvSpPr>
+          <p:cNvPr id="10" name="Shape 7"/>
+          <p:cNvSpPr/>
+          <p:nvPr/>
+        </p:nvSpPr>
+        <p:spPr>
+          <a:xfrm>
+            <a:off x="502920" y="5586984"/>
+            <a:ext cx="3246120" cy="402336"/>
+          </a:xfrm>
+          <a:prstGeom prst="roundRect">
+            <a:avLst>
+              <a:gd name="adj" fmla="val 13636"/>
+            </a:avLst>
+          </a:prstGeom>
+          <a:solidFill>
+            <a:srgbClr val="F4F5F3"/>
+          </a:solidFill>
+          <a:ln w="9525">
+            <a:solidFill>
+              <a:srgbClr val="DDE0DC"/>
+            </a:solidFill>
+            <a:prstDash val="solid"/>
+          </a:ln>
+        </p:spPr>
+      </p:sp>
+      <p:sp>
+        <p:nvSpPr>
+          <p:cNvPr id="11" name="Text 8"/>
+          <p:cNvSpPr/>
+          <p:nvPr/>
+        </p:nvSpPr>
+        <p:spPr>
+          <a:xfrm>
+            <a:off x="612648" y="5586984"/>
+            <a:ext cx="3063240" cy="402336"/>
+          </a:xfrm>
+          <a:prstGeom prst="rect">
+            <a:avLst/>
+          </a:prstGeom>
+          <a:noFill/>
+          <a:ln/>
+        </p:spPr>
+        <p:txBody>
+          <a:bodyPr wrap="square" lIns="0" tIns="0" rIns="0" bIns="0" rtlCol="0" anchor="ctr"/>
+          <a:lstStyle/>
+          <a:p>
+            <a:pPr indent="0" marL="0">
+              <a:buNone/>
+            </a:pPr>
+            <a:r>
+              <a:rPr lang="en-US" sz="1100" dirty="0">
+                <a:solidFill>
+                  <a:srgbClr val="5E6369"/>
+                </a:solidFill>
+                <a:latin typeface="Calibri" pitchFamily="34" charset="0"/>
+                <a:ea typeface="Calibri" pitchFamily="34" charset="-122"/>
+                <a:cs typeface="Calibri" pitchFamily="34" charset="-120"/>
+              </a:rPr>
+              <a:t>bridge MAC  </a:t>
+            </a:r>
+            <a:pPr indent="0" marL="0">
+              <a:buNone/>
+            </a:pPr>
+            <a:r>
+              <a:rPr lang="en-US" sz="1100" b="1" dirty="0">
+                <a:solidFill>
+                  <a:srgbClr val="B23327"/>
+                </a:solidFill>
+                <a:latin typeface="Calibri" pitchFamily="34" charset="0"/>
+                <a:ea typeface="Calibri" pitchFamily="34" charset="-122"/>
+                <a:cs typeface="Calibri" pitchFamily="34" charset="-120"/>
+              </a:rPr>
+              <a:t>≈ 47 m²/g</a:t>
+            </a:r>
+            <a:endParaRPr lang="en-US" sz="1100" dirty="0"/>
+          </a:p>
+        </p:txBody>
+      </p:sp>
+      <p:sp>
+        <p:nvSpPr>
+          <p:cNvPr id="12" name="Shape 9"/>
+          <p:cNvSpPr/>
+          <p:nvPr/>
+        </p:nvSpPr>
+        <p:spPr>
+          <a:xfrm>
+            <a:off x="502920" y="6099048"/>
+            <a:ext cx="3246120" cy="402336"/>
+          </a:xfrm>
+          <a:prstGeom prst="roundRect">
+            <a:avLst>
+              <a:gd name="adj" fmla="val 13636"/>
+            </a:avLst>
+          </a:prstGeom>
+          <a:solidFill>
+            <a:srgbClr val="F4F5F3"/>
+          </a:solidFill>
+          <a:ln w="9525">
+            <a:solidFill>
+              <a:srgbClr val="DDE0DC"/>
+            </a:solidFill>
+            <a:prstDash val="solid"/>
+          </a:ln>
+        </p:spPr>
+      </p:sp>
+      <p:sp>
+        <p:nvSpPr>
+          <p:cNvPr id="13" name="Text 10"/>
+          <p:cNvSpPr/>
+          <p:nvPr/>
+        </p:nvSpPr>
+        <p:spPr>
+          <a:xfrm>
+            <a:off x="612648" y="6099048"/>
+            <a:ext cx="3063240" cy="402336"/>
+          </a:xfrm>
+          <a:prstGeom prst="rect">
+            <a:avLst/>
+          </a:prstGeom>
+          <a:noFill/>
+          <a:ln/>
+        </p:spPr>
+        <p:txBody>
+          <a:bodyPr wrap="square" lIns="0" tIns="0" rIns="0" bIns="0" rtlCol="0" anchor="ctr"/>
+          <a:lstStyle/>
+          <a:p>
+            <a:pPr indent="0" marL="0">
+              <a:buNone/>
+            </a:pPr>
+            <a:r>
+              <a:rPr lang="en-US" sz="1100" dirty="0">
+                <a:solidFill>
+                  <a:srgbClr val="5E6369"/>
+                </a:solidFill>
+                <a:latin typeface="Calibri" pitchFamily="34" charset="0"/>
+                <a:ea typeface="Calibri" pitchFamily="34" charset="-122"/>
+                <a:cs typeface="Calibri" pitchFamily="34" charset="-120"/>
+              </a:rPr>
+              <a:t>ETBI HIPS filters  </a:t>
+            </a:r>
+            <a:pPr indent="0" marL="0">
+              <a:buNone/>
+            </a:pPr>
+            <a:r>
+              <a:rPr lang="en-US" sz="1100" b="1" dirty="0">
+                <a:solidFill>
+                  <a:srgbClr val="2C6E9E"/>
+                </a:solidFill>
+                <a:latin typeface="Calibri" pitchFamily="34" charset="0"/>
+                <a:ea typeface="Calibri" pitchFamily="34" charset="-122"/>
+                <a:cs typeface="Calibri" pitchFamily="34" charset="-120"/>
+              </a:rPr>
+              <a:t>26, unused</a:t>
+            </a:r>
+            <a:endParaRPr lang="en-US" sz="1100" dirty="0"/>
+          </a:p>
+        </p:txBody>
+      </p:sp>
+    </p:spTree>
+  </p:cSld>
+  <p:clrMapOvr>
+    <a:masterClrMapping/>
+  </p:clrMapOvr>
+</p:sld>
+</file>
+
+<file path=ppt/slides/slide17.xml><?xml version="1.0" encoding="utf-8"?>
+<p:sld xmlns:a="http://schemas.openxmlformats.org/drawingml/2006/main" xmlns:r="http://schemas.openxmlformats.org/officeDocument/2006/relationships" xmlns:p="http://schemas.openxmlformats.org/presentationml/2006/main">
+  <p:cSld name="Slide 17">
     <p:bg>
       <p:bgPr>
         <a:solidFill>
@@ -5949,7 +6598,7 @@
                 <a:ea typeface="Calibri" pitchFamily="34" charset="-122"/>
                 <a:cs typeface="Calibri" pitchFamily="34" charset="-120"/>
               </a:rPr>
-              <a:t>The baselining trade-off</a:t>
+              <a:t>Baselining &amp; components</a:t>
             </a:r>
             <a:endParaRPr lang="en-US" sz="1250" dirty="0"/>
           </a:p>
@@ -5988,7 +6637,7 @@
                 <a:ea typeface="Calibri" pitchFamily="34" charset="-122"/>
                 <a:cs typeface="Calibri" pitchFamily="34" charset="-120"/>
               </a:rPr>
-              <a:t>How much real EC signal does full baseline removal discard — and is a middle path worth testing against AIRSpec?</a:t>
+              <a:t>How much real EC signal does baseline removal discard? And is k = 4–5 defensible on corrected spectra — must k match across models?</a:t>
             </a:r>
             <a:endParaRPr lang="en-US" sz="950" dirty="0"/>
           </a:p>
@@ -6342,7 +6991,7 @@
                 <a:ea typeface="Courier New" pitchFamily="34" charset="-122"/>
                 <a:cs typeface="Courier New" pitchFamily="34" charset="-120"/>
               </a:rPr>
-              <a:t>Sources: research/ftir_ec_phase3 (ftir_11–27) · every figure is executed notebook output · every number traces to a committed table.</a:t>
+              <a:t>Sources: research/ftir_ec_phase3 (ftir_11–27) · every figure is executed notebook output · every number traces to a committed table · intercepts in µg/m³ throughout.</a:t>
             </a:r>
             <a:endParaRPr lang="en-US" sz="950" dirty="0"/>
           </a:p>
@@ -6553,7 +7202,7 @@
                 <a:ea typeface="Calibri" pitchFamily="34" charset="-122"/>
                 <a:cs typeface="Calibri" pitchFamily="34" charset="-120"/>
               </a:rPr>
-              <a:t>AIRSpec ported to Python, validated to ~10⁻⁷ against the R output</a:t>
+              <a:t>AIRSpec baseline correction ported to Python, validated to ~10⁻⁷ vs the R output</a:t>
             </a:r>
             <a:endParaRPr lang="en-US" sz="1100" dirty="0"/>
           </a:p>
@@ -6755,7 +7404,7 @@
                 <a:ea typeface="Calibri" pitchFamily="34" charset="-122"/>
                 <a:cs typeface="Calibri" pitchFamily="34" charset="-120"/>
               </a:rPr>
-              <a:t>Lowest-OC/EC (800) + AIRSpec locked as the terminal IMPROVE-only candidate</a:t>
+              <a:t>Lowest-OC/EC (800) + baseline correction locked as the terminal IMPROVE-only candidate</a:t>
             </a:r>
             <a:endParaRPr lang="en-US" sz="1100" dirty="0"/>
           </a:p>
@@ -7602,7 +8251,7 @@
                 <a:ea typeface="Calibri" pitchFamily="34" charset="-122"/>
                 <a:cs typeface="Calibri" pitchFamily="34" charset="-120"/>
               </a:rPr>
-              <a:t>INDH / CHTS / ETBI spectra export (same shape as the ETAD pull)</a:t>
+              <a:t>How many PLS components — and must it match across models?</a:t>
             </a:r>
             <a:endParaRPr lang="en-US" sz="1100" dirty="0"/>
           </a:p>
@@ -7635,13 +8284,13 @@
             <a:r>
               <a:rPr lang="en-US" sz="850" dirty="0">
                 <a:solidFill>
-                  <a:srgbClr val="B23327"/>
+                  <a:srgbClr val="2C6E9E"/>
                 </a:solidFill>
                 <a:latin typeface="Courier New" pitchFamily="34" charset="0"/>
                 <a:ea typeface="Courier New" pitchFamily="34" charset="-122"/>
                 <a:cs typeface="Courier New" pitchFamily="34" charset="-120"/>
               </a:rPr>
-              <a:t>blocked · data</a:t>
+              <a:t>discuss</a:t>
             </a:r>
             <a:endParaRPr lang="en-US" sz="850" dirty="0"/>
           </a:p>
@@ -7703,7 +8352,7 @@
                 <a:ea typeface="Calibri" pitchFamily="34" charset="-122"/>
                 <a:cs typeface="Calibri" pitchFamily="34" charset="-120"/>
               </a:rPr>
-              <a:t>Dry vs non-dry split, predicted separately (ftir_24)</a:t>
+              <a:t>INDH / CHTS / ETBI spectra export (same shape as the ETAD pull)</a:t>
             </a:r>
             <a:endParaRPr lang="en-US" sz="1100" dirty="0"/>
           </a:p>
@@ -7736,13 +8385,13 @@
             <a:r>
               <a:rPr lang="en-US" sz="850" dirty="0">
                 <a:solidFill>
-                  <a:srgbClr val="B0792B"/>
+                  <a:srgbClr val="B23327"/>
                 </a:solidFill>
                 <a:latin typeface="Courier New" pitchFamily="34" charset="0"/>
                 <a:ea typeface="Courier New" pitchFamily="34" charset="-122"/>
                 <a:cs typeface="Courier New" pitchFamily="34" charset="-120"/>
               </a:rPr>
-              <a:t>next notebook</a:t>
+              <a:t>blocked · data</a:t>
             </a:r>
             <a:endParaRPr lang="en-US" sz="850" dirty="0"/>
           </a:p>
@@ -7993,7 +8642,7 @@
       </p:sp>
       <p:pic>
         <p:nvPicPr>
-          <p:cNvPr id="5" name="Image 0" descr="/Users/ahmadjalil/github/aethmodular/research/ftir_ec_phase3/output/plots/deck/deployed_alldata_crossplot.png">    </p:cNvPr>
+          <p:cNvPr id="5" name="Image 0" descr="/private/tmp/claude-501/-Users-ahmadjalil-github-aethmodular/98af0981-a12c-4f18-82f4-663747dfdcd7/scratchpad/plates/deployed_alldata_crossplot.png">    </p:cNvPr>
           <p:cNvPicPr>
             <a:picLocks noChangeAspect="1"/>
           </p:cNvPicPr>
@@ -8061,7 +8710,7 @@
                 <a:ea typeface="Calibri" pitchFamily="34" charset="-122"/>
                 <a:cs typeface="Calibri" pitchFamily="34" charset="-120"/>
               </a:rPr>
-              <a:t>FTIR EC (y) vs HIPS Fabs/MAC (x); deployed predictions exist only for the fixed 190</a:t>
+              <a:t>FTIR EC (y, µg/m³) vs HIPS Fabs/MAC (x); deployed predictions exist only for the fixed 190</a:t>
             </a:r>
             <a:endParaRPr lang="en-US" sz="850" dirty="0"/>
           </a:p>
@@ -8076,7 +8725,7 @@
         <p:spPr>
           <a:xfrm>
             <a:off x="502920" y="1737360"/>
-            <a:ext cx="3566160" cy="2926080"/>
+            <a:ext cx="3566160" cy="3108960"/>
           </a:xfrm>
           <a:prstGeom prst="rect">
             <a:avLst/>
@@ -8103,7 +8752,7 @@
                 <a:ea typeface="Calibri" pitchFamily="34" charset="-122"/>
                 <a:cs typeface="Calibri" pitchFamily="34" charset="-120"/>
               </a:rPr>
-              <a:t>This is the plot the whole project hangs on: the network calibration, carried to Addis, is steep with a deep negative intercept.</a:t>
+              <a:t>The network calibration, carried to Addis, is steep with a deep negative y-intercept (µg/m³).</a:t>
             </a:r>
             <a:endParaRPr lang="en-US" sz="1250" dirty="0"/>
           </a:p>
@@ -8123,7 +8772,7 @@
                 <a:ea typeface="Calibri" pitchFamily="34" charset="-122"/>
                 <a:cs typeface="Calibri" pitchFamily="34" charset="-120"/>
               </a:rPr>
-              <a:t>At MAC 6 it pivots to slope 1.14 but the intercept stays at −4.17 — that invariance is proved in part D.</a:t>
+              <a:t>At MAC 6 it pivots to slope 1.14 but the intercept stays at −4.17 — dividing x by a constant cannot move where the line crosses y. Proved for every setup in part D.</a:t>
             </a:r>
             <a:endParaRPr lang="en-US" sz="1250" dirty="0"/>
           </a:p>
@@ -8157,7 +8806,7 @@
         </p:nvSpPr>
         <p:spPr>
           <a:xfrm>
-            <a:off x="502920" y="4572000"/>
+            <a:off x="502920" y="4754880"/>
             <a:ext cx="3246120" cy="402336"/>
           </a:xfrm>
           <a:prstGeom prst="roundRect">
@@ -8184,7 +8833,7 @@
         </p:nvSpPr>
         <p:spPr>
           <a:xfrm>
-            <a:off x="612648" y="4572000"/>
+            <a:off x="612648" y="4754880"/>
             <a:ext cx="3063240" cy="402336"/>
           </a:xfrm>
           <a:prstGeom prst="rect">
@@ -8237,7 +8886,7 @@
         </p:nvSpPr>
         <p:spPr>
           <a:xfrm>
-            <a:off x="502920" y="5084064"/>
+            <a:off x="502920" y="5266944"/>
             <a:ext cx="3246120" cy="402336"/>
           </a:xfrm>
           <a:prstGeom prst="roundRect">
@@ -8264,7 +8913,7 @@
         </p:nvSpPr>
         <p:spPr>
           <a:xfrm>
-            <a:off x="612648" y="5084064"/>
+            <a:off x="612648" y="5266944"/>
             <a:ext cx="3063240" cy="402336"/>
           </a:xfrm>
           <a:prstGeom prst="rect">
@@ -8317,7 +8966,7 @@
         </p:nvSpPr>
         <p:spPr>
           <a:xfrm>
-            <a:off x="502920" y="5596128"/>
+            <a:off x="502920" y="5779008"/>
             <a:ext cx="3246120" cy="402336"/>
           </a:xfrm>
           <a:prstGeom prst="roundRect">
@@ -8344,7 +8993,7 @@
         </p:nvSpPr>
         <p:spPr>
           <a:xfrm>
-            <a:off x="612648" y="5596128"/>
+            <a:off x="612648" y="5779008"/>
             <a:ext cx="3063240" cy="402336"/>
           </a:xfrm>
           <a:prstGeom prst="rect">
@@ -8369,7 +9018,7 @@
                 <a:ea typeface="Calibri" pitchFamily="34" charset="-122"/>
                 <a:cs typeface="Calibri" pitchFamily="34" charset="-120"/>
               </a:rPr>
-              <a:t>R² 0.76 · RMSE  </a:t>
+              <a:t>implied “native” MAC  </a:t>
             </a:r>
             <a:pPr indent="0" marL="0">
               <a:buNone/>
@@ -8377,13 +9026,13 @@
             <a:r>
               <a:rPr lang="en-US" sz="1100" b="1" dirty="0">
                 <a:solidFill>
-                  <a:srgbClr val="5E6369"/>
-                </a:solidFill>
-                <a:latin typeface="Calibri" pitchFamily="34" charset="0"/>
-                <a:ea typeface="Calibri" pitchFamily="34" charset="-122"/>
-                <a:cs typeface="Calibri" pitchFamily="34" charset="-120"/>
-              </a:rPr>
-              <a:t>1.49</a:t>
+                  <a:srgbClr val="B0792B"/>
+                </a:solidFill>
+                <a:latin typeface="Calibri" pitchFamily="34" charset="0"/>
+                <a:ea typeface="Calibri" pitchFamily="34" charset="-122"/>
+                <a:cs typeface="Calibri" pitchFamily="34" charset="-120"/>
+              </a:rPr>
+              <a:t>≈ 5.3</a:t>
             </a:r>
             <a:endParaRPr lang="en-US" sz="1100" dirty="0"/>
           </a:p>
@@ -8533,7 +9182,7 @@
       </p:sp>
       <p:pic>
         <p:nvPicPr>
-          <p:cNvPr id="5" name="Image 0" descr="/Users/ahmadjalil/github/aethmodular/research/ftir_ec_phase3/output/plots/deck/filtering_by_ocec.png">    </p:cNvPr>
+          <p:cNvPr id="5" name="Image 0" descr="/private/tmp/claude-501/-Users-ahmadjalil-github-aethmodular/98af0981-a12c-4f18-82f4-663747dfdcd7/scratchpad/plates/filtering_by_ocec.png">    </p:cNvPr>
           <p:cNvPicPr>
             <a:picLocks noChangeAspect="1"/>
           </p:cNvPicPr>
@@ -8616,7 +9265,7 @@
         <p:spPr>
           <a:xfrm>
             <a:off x="502920" y="1737360"/>
-            <a:ext cx="3566160" cy="3291840"/>
+            <a:ext cx="3566160" cy="3566160"/>
           </a:xfrm>
           <a:prstGeom prst="rect">
             <a:avLst/>
@@ -8663,10 +9312,30 @@
                 <a:ea typeface="Calibri" pitchFamily="34" charset="-122"/>
                 <a:cs typeface="Calibri" pitchFamily="34" charset="-120"/>
               </a:rPr>
-              <a:t>That cohort beats the deployed, smoke-906, no-selection and analog cohorts like-for-like: same 190 Addis filters, RMSE 1.16 vs 1.48–2.24; held-out TOR R² 0.911 vs 0.594–0.775. Engineering beyond it breaks the TOR test — this is the terminal IMPROVE-only candidate.</a:t>
+              <a:t>Like-for-like, that cohort wins: same 190 Addis filters, RMSE 1.16 vs 1.48–2.24 µg/m³; held-out TOR R² 0.911 vs 0.594–0.775.</a:t>
             </a:r>
             <a:endParaRPr lang="en-US" sz="1250" dirty="0"/>
           </a:p>
+          <a:p>
+            <a:pPr algn="l" indent="0" marL="0">
+              <a:spcAft>
+                <a:spcPts val="800"/>
+              </a:spcAft>
+              <a:buNone/>
+            </a:pPr>
+            <a:r>
+              <a:rPr lang="en-US" sz="1250" b="1" dirty="0">
+                <a:solidFill>
+                  <a:srgbClr val="1A1D21"/>
+                </a:solidFill>
+                <a:latin typeface="Calibri" pitchFamily="34" charset="0"/>
+                <a:ea typeface="Calibri" pitchFamily="34" charset="-122"/>
+                <a:cs typeface="Calibri" pitchFamily="34" charset="-120"/>
+              </a:rPr>
+              <a:t>New since yesterday: the Ethiopia-shaped-300 and lowest-OC/EC-800 cohorts share 1 filter. Shape-similarity and composition-similarity select disjoint filters.</a:t>
+            </a:r>
+            <a:endParaRPr lang="en-US" sz="1250" dirty="0"/>
+          </a:p>
         </p:txBody>
       </p:sp>
       <p:sp>
@@ -8677,8 +9346,8 @@
         </p:nvSpPr>
         <p:spPr>
           <a:xfrm>
-            <a:off x="502920" y="4572000"/>
-            <a:ext cx="3566160" cy="402336"/>
+            <a:off x="502920" y="5257800"/>
+            <a:ext cx="3246120" cy="402336"/>
           </a:xfrm>
           <a:prstGeom prst="roundRect">
             <a:avLst>
@@ -8704,8 +9373,8 @@
         </p:nvSpPr>
         <p:spPr>
           <a:xfrm>
-            <a:off x="612648" y="4572000"/>
-            <a:ext cx="3383280" cy="402336"/>
+            <a:off x="612648" y="5257800"/>
+            <a:ext cx="3063240" cy="402336"/>
           </a:xfrm>
           <a:prstGeom prst="rect">
             <a:avLst/>
@@ -8757,8 +9426,8 @@
         </p:nvSpPr>
         <p:spPr>
           <a:xfrm>
-            <a:off x="502920" y="5084064"/>
-            <a:ext cx="3566160" cy="402336"/>
+            <a:off x="502920" y="5769864"/>
+            <a:ext cx="3246120" cy="402336"/>
           </a:xfrm>
           <a:prstGeom prst="roundRect">
             <a:avLst>
@@ -8784,8 +9453,8 @@
         </p:nvSpPr>
         <p:spPr>
           <a:xfrm>
-            <a:off x="612648" y="5084064"/>
-            <a:ext cx="3383280" cy="402336"/>
+            <a:off x="612648" y="5769864"/>
+            <a:ext cx="3063240" cy="402336"/>
           </a:xfrm>
           <a:prstGeom prst="rect">
             <a:avLst/>
@@ -8809,7 +9478,7 @@
                 <a:ea typeface="Calibri" pitchFamily="34" charset="-122"/>
                 <a:cs typeface="Calibri" pitchFamily="34" charset="-120"/>
               </a:rPr>
-              <a:t>same-190 RMSE  </a:t>
+              <a:t>eth-300 ∩ ocec-800  </a:t>
             </a:r>
             <a:pPr indent="0" marL="0">
               <a:buNone/>
@@ -8817,93 +9486,13 @@
             <a:r>
               <a:rPr lang="en-US" sz="1100" b="1" dirty="0">
                 <a:solidFill>
-                  <a:srgbClr val="3F7A56"/>
-                </a:solidFill>
-                <a:latin typeface="Calibri" pitchFamily="34" charset="0"/>
-                <a:ea typeface="Calibri" pitchFamily="34" charset="-122"/>
-                <a:cs typeface="Calibri" pitchFamily="34" charset="-120"/>
-              </a:rPr>
-              <a:t>1.16 vs 1.48–2.24</a:t>
-            </a:r>
-            <a:endParaRPr lang="en-US" sz="1100" dirty="0"/>
-          </a:p>
-        </p:txBody>
-      </p:sp>
-      <p:sp>
-        <p:nvSpPr>
-          <p:cNvPr id="12" name="Shape 9"/>
-          <p:cNvSpPr/>
-          <p:nvPr/>
-        </p:nvSpPr>
-        <p:spPr>
-          <a:xfrm>
-            <a:off x="502920" y="5596128"/>
-            <a:ext cx="3566160" cy="402336"/>
-          </a:xfrm>
-          <a:prstGeom prst="roundRect">
-            <a:avLst>
-              <a:gd name="adj" fmla="val 13636"/>
-            </a:avLst>
-          </a:prstGeom>
-          <a:solidFill>
-            <a:srgbClr val="F4F5F3"/>
-          </a:solidFill>
-          <a:ln w="9525">
-            <a:solidFill>
-              <a:srgbClr val="DDE0DC"/>
-            </a:solidFill>
-            <a:prstDash val="solid"/>
-          </a:ln>
-        </p:spPr>
-      </p:sp>
-      <p:sp>
-        <p:nvSpPr>
-          <p:cNvPr id="13" name="Text 10"/>
-          <p:cNvSpPr/>
-          <p:nvPr/>
-        </p:nvSpPr>
-        <p:spPr>
-          <a:xfrm>
-            <a:off x="612648" y="5596128"/>
-            <a:ext cx="3383280" cy="402336"/>
-          </a:xfrm>
-          <a:prstGeom prst="rect">
-            <a:avLst/>
-          </a:prstGeom>
-          <a:noFill/>
-          <a:ln/>
-        </p:spPr>
-        <p:txBody>
-          <a:bodyPr wrap="square" lIns="0" tIns="0" rIns="0" bIns="0" rtlCol="0" anchor="ctr"/>
-          <a:lstStyle/>
-          <a:p>
-            <a:pPr indent="0" marL="0">
-              <a:buNone/>
-            </a:pPr>
-            <a:r>
-              <a:rPr lang="en-US" sz="1100" dirty="0">
-                <a:solidFill>
-                  <a:srgbClr val="5E6369"/>
-                </a:solidFill>
-                <a:latin typeface="Calibri" pitchFamily="34" charset="0"/>
-                <a:ea typeface="Calibri" pitchFamily="34" charset="-122"/>
-                <a:cs typeface="Calibri" pitchFamily="34" charset="-120"/>
-              </a:rPr>
-              <a:t>held-out TOR R²  </a:t>
-            </a:r>
-            <a:pPr indent="0" marL="0">
-              <a:buNone/>
-            </a:pPr>
-            <a:r>
-              <a:rPr lang="en-US" sz="1100" b="1" dirty="0">
-                <a:solidFill>
-                  <a:srgbClr val="3F7A56"/>
-                </a:solidFill>
-                <a:latin typeface="Calibri" pitchFamily="34" charset="0"/>
-                <a:ea typeface="Calibri" pitchFamily="34" charset="-122"/>
-                <a:cs typeface="Calibri" pitchFamily="34" charset="-120"/>
-              </a:rPr>
-              <a:t>0.911 vs 0.59–0.78</a:t>
+                  <a:srgbClr val="B23327"/>
+                </a:solidFill>
+                <a:latin typeface="Calibri" pitchFamily="34" charset="0"/>
+                <a:ea typeface="Calibri" pitchFamily="34" charset="-122"/>
+                <a:cs typeface="Calibri" pitchFamily="34" charset="-120"/>
+              </a:rPr>
+              <a:t>1 filter</a:t>
             </a:r>
             <a:endParaRPr lang="en-US" sz="1100" dirty="0"/>
           </a:p>
@@ -8974,7 +9563,7 @@
                 <a:ea typeface="Courier New" pitchFamily="34" charset="-122"/>
                 <a:cs typeface="Courier New" pitchFamily="34" charset="-120"/>
               </a:rPr>
-              <a:t>A·03 · THE SETUP MATRIX — EVERY TRAINING CHOICE, ONE TABLE</a:t>
+              <a:t>A·03 · EVERY TRAINING CHOICE, ONE TABLE — SITE-HELD-OUT PROTOCOL, INTERCEPTS IN ΜG/M³</a:t>
             </a:r>
             <a:endParaRPr lang="en-US" sz="1100" dirty="0"/>
           </a:p>
@@ -9013,7 +9602,7 @@
                 <a:ea typeface="Calibri" pitchFamily="34" charset="-122"/>
                 <a:cs typeface="Calibri" pitchFamily="34" charset="-120"/>
               </a:rPr>
-              <a:t>Lowest-OC/EC + AIRSpec ends at −1.62 — and is the only setup robust to who processes it.</a:t>
+              <a:t>Lowest-OC/EC + baseline correction ends at −1.62 — and is the only setup robust to who processes it.</a:t>
             </a:r>
             <a:endParaRPr lang="en-US" sz="2600" dirty="0"/>
           </a:p>
@@ -9053,7 +9642,7 @@
       </p:sp>
       <p:pic>
         <p:nvPicPr>
-          <p:cNvPr id="5" name="Image 0" descr="/Users/ahmadjalil/github/aethmodular/research/ftir_ec_phase3/output/plots/deck/by_protocol/site_held_out/calibration_setup_matrix.png">    </p:cNvPr>
+          <p:cNvPr id="5" name="Image 0" descr="/private/tmp/claude-501/-Users-ahmadjalil-github-aethmodular/98af0981-a12c-4f18-82f4-663747dfdcd7/scratchpad/plates/calibration_setup_matrix_shp.png">    </p:cNvPr>
           <p:cNvPicPr>
             <a:picLocks noChangeAspect="1"/>
           </p:cNvPicPr>
@@ -9121,7 +9710,7 @@
                 <a:ea typeface="Calibri" pitchFamily="34" charset="-122"/>
                 <a:cs typeface="Calibri" pitchFamily="34" charset="-120"/>
               </a:rPr>
-              <a:t>Row 1 is the entire IMPROVE network (13,010) — ETAD spectra are evaluation-only</a:t>
+              <a:t>All intercepts µg/m³, site-grouped 5-fold CV, first-major-minimum k. Row 1 = whole IMPROVE network; ETAD spectra are evaluation-only</a:t>
             </a:r>
             <a:endParaRPr lang="en-US" sz="850" dirty="0"/>
           </a:p>
@@ -9136,7 +9725,7 @@
         <p:spPr>
           <a:xfrm>
             <a:off x="502920" y="1737360"/>
-            <a:ext cx="3246120" cy="3291840"/>
+            <a:ext cx="3246120" cy="3566160"/>
           </a:xfrm>
           <a:prstGeom prst="rect">
             <a:avLst/>
@@ -9163,7 +9752,7 @@
                 <a:ea typeface="Calibri" pitchFamily="34" charset="-122"/>
                 <a:cs typeface="Calibri" pitchFamily="34" charset="-120"/>
               </a:rPr>
-              <a:t>The intercept ladder runs −4.17 (deployed) → −3.22 (lowest-OC/EC raw) → −1.62 (+ AIRSpec).</a:t>
+              <a:t>The intercept ladder: −4.17 (deployed) → −3.22 (lowest-OC/EC raw) → −1.62 (+ baseline correction).</a:t>
             </a:r>
             <a:endParaRPr lang="en-US" sz="1250" dirty="0"/>
           </a:p>
@@ -9175,6 +9764,26 @@
               <a:buNone/>
             </a:pPr>
             <a:r>
+              <a:rPr lang="en-US" sz="1250" b="1" dirty="0">
+                <a:solidFill>
+                  <a:srgbClr val="1A1D21"/>
+                </a:solidFill>
+                <a:latin typeface="Calibri" pitchFamily="34" charset="0"/>
+                <a:ea typeface="Calibri" pitchFamily="34" charset="-122"/>
+                <a:cs typeface="Calibri" pitchFamily="34" charset="-120"/>
+              </a:rPr>
+              <a:t>Protocol matters more than MAC: the same smoke-906 filters give −0.99 here (k = 4) but −6.91 under the Calibration-app protocol (k = 19). The corrected setup is the one that barely moves: −1.65 vs −1.62.</a:t>
+            </a:r>
+            <a:endParaRPr lang="en-US" sz="1250" dirty="0"/>
+          </a:p>
+          <a:p>
+            <a:pPr algn="l" indent="0" marL="0">
+              <a:spcAft>
+                <a:spcPts val="800"/>
+              </a:spcAft>
+              <a:buNone/>
+            </a:pPr>
+            <a:r>
               <a:rPr lang="en-US" sz="1250" dirty="0">
                 <a:solidFill>
                   <a:srgbClr val="1A1D21"/>
@@ -9183,7 +9792,7 @@
                 <a:ea typeface="Calibri" pitchFamily="34" charset="-122"/>
                 <a:cs typeface="Calibri" pitchFamily="34" charset="-120"/>
               </a:rPr>
-              <a:t>The corrected setup barely moves between your group's Calibration-app protocol and our site-held-out protocol (−1.65 vs −1.62), while raw setups swing by more than a µg/m³ on the component choice alone. It passes the disjoint-site TOR test cleanly (slope 1.01, R² 0.90).</a:t>
+              <a:t>It also passes the disjoint-site TOR test cleanly (slope 1.01, R² 0.90).</a:t>
             </a:r>
             <a:endParaRPr lang="en-US" sz="1250" dirty="0"/>
           </a:p>
@@ -9197,7 +9806,7 @@
         </p:nvSpPr>
         <p:spPr>
           <a:xfrm>
-            <a:off x="502920" y="4572000"/>
+            <a:off x="502920" y="5074920"/>
             <a:ext cx="3246120" cy="402336"/>
           </a:xfrm>
           <a:prstGeom prst="roundRect">
@@ -9224,7 +9833,7 @@
         </p:nvSpPr>
         <p:spPr>
           <a:xfrm>
-            <a:off x="612648" y="4572000"/>
+            <a:off x="612648" y="5074920"/>
             <a:ext cx="3063240" cy="402336"/>
           </a:xfrm>
           <a:prstGeom prst="rect">
@@ -9263,7 +9872,7 @@
                 <a:ea typeface="Calibri" pitchFamily="34" charset="-122"/>
                 <a:cs typeface="Calibri" pitchFamily="34" charset="-120"/>
               </a:rPr>
-              <a:t>−1.62</a:t>
+              <a:t>−1.62 µg/m³</a:t>
             </a:r>
             <a:endParaRPr lang="en-US" sz="1100" dirty="0"/>
           </a:p>
@@ -9277,7 +9886,7 @@
         </p:nvSpPr>
         <p:spPr>
           <a:xfrm>
-            <a:off x="502920" y="5084064"/>
+            <a:off x="502920" y="5586984"/>
             <a:ext cx="3246120" cy="402336"/>
           </a:xfrm>
           <a:prstGeom prst="roundRect">
@@ -9304,7 +9913,7 @@
         </p:nvSpPr>
         <p:spPr>
           <a:xfrm>
-            <a:off x="612648" y="5084064"/>
+            <a:off x="612648" y="5586984"/>
             <a:ext cx="3063240" cy="402336"/>
           </a:xfrm>
           <a:prstGeom prst="rect">
@@ -9357,7 +9966,7 @@
         </p:nvSpPr>
         <p:spPr>
           <a:xfrm>
-            <a:off x="502920" y="5596128"/>
+            <a:off x="502920" y="6099048"/>
             <a:ext cx="3246120" cy="402336"/>
           </a:xfrm>
           <a:prstGeom prst="roundRect">
@@ -9384,7 +9993,7 @@
         </p:nvSpPr>
         <p:spPr>
           <a:xfrm>
-            <a:off x="612648" y="5596128"/>
+            <a:off x="612648" y="6099048"/>
             <a:ext cx="3063240" cy="402336"/>
           </a:xfrm>
           <a:prstGeom prst="rect">
@@ -9409,7 +10018,7 @@
                 <a:ea typeface="Calibri" pitchFamily="34" charset="-122"/>
                 <a:cs typeface="Calibri" pitchFamily="34" charset="-120"/>
               </a:rPr>
-              <a:t>held-out TOR  </a:t>
+              <a:t>smoke by protocol  </a:t>
             </a:r>
             <a:pPr indent="0" marL="0">
               <a:buNone/>
@@ -9417,13 +10026,13 @@
             <a:r>
               <a:rPr lang="en-US" sz="1100" b="1" dirty="0">
                 <a:solidFill>
-                  <a:srgbClr val="3F7A56"/>
-                </a:solidFill>
-                <a:latin typeface="Calibri" pitchFamily="34" charset="0"/>
-                <a:ea typeface="Calibri" pitchFamily="34" charset="-122"/>
-                <a:cs typeface="Calibri" pitchFamily="34" charset="-120"/>
-              </a:rPr>
-              <a:t>1.01x · R² 0.90</a:t>
+                  <a:srgbClr val="B0792B"/>
+                </a:solidFill>
+                <a:latin typeface="Calibri" pitchFamily="34" charset="0"/>
+                <a:ea typeface="Calibri" pitchFamily="34" charset="-122"/>
+                <a:cs typeface="Calibri" pitchFamily="34" charset="-120"/>
+              </a:rPr>
+              <a:t>−0.99 vs −6.91</a:t>
             </a:r>
             <a:endParaRPr lang="en-US" sz="1100" dirty="0"/>
           </a:p>
@@ -9573,7 +10182,7 @@
       </p:sp>
       <p:pic>
         <p:nvPicPr>
-          <p:cNvPr id="5" name="Image 0" descr="/Users/ahmadjalil/github/aethmodular/research/ftir_ec_phase3/output/plots/deck/airspec_1_baseline.png">    </p:cNvPr>
+          <p:cNvPr id="5" name="Image 0" descr="/private/tmp/claude-501/-Users-ahmadjalil-github-aethmodular/98af0981-a12c-4f18-82f4-663747dfdcd7/scratchpad/plates/airspec_1_baseline.png">    </p:cNvPr>
           <p:cNvPicPr>
             <a:picLocks noChangeAspect="1"/>
           </p:cNvPicPr>
@@ -9656,7 +10265,7 @@
         <p:spPr>
           <a:xfrm>
             <a:off x="502920" y="1737360"/>
-            <a:ext cx="3291840" cy="3108960"/>
+            <a:ext cx="3291840" cy="3566160"/>
           </a:xfrm>
           <a:prstGeom prst="rect">
             <a:avLst/>
@@ -9683,7 +10292,7 @@
                 <a:ea typeface="Calibri" pitchFamily="34" charset="-122"/>
                 <a:cs typeface="Calibri" pitchFamily="34" charset="-120"/>
               </a:rPr>
-              <a:t>The black line is a single real filter; the red dash is the smoothing-spline baseline AIRSpec fits underneath it, per spectrum. The shaded sliver is all that is actually bands.</a:t>
+              <a:t>“Baseline-corrected (AIRSpec)” throughout = the APRLssb segmented-spline correction only — we use that one component of the package.</a:t>
             </a:r>
             <a:endParaRPr lang="en-US" sz="1250" dirty="0"/>
           </a:p>
@@ -9695,6 +10304,26 @@
               <a:buNone/>
             </a:pPr>
             <a:r>
+              <a:rPr lang="en-US" sz="1250" dirty="0">
+                <a:solidFill>
+                  <a:srgbClr val="1A1D21"/>
+                </a:solidFill>
+                <a:latin typeface="Calibri" pitchFamily="34" charset="0"/>
+                <a:ea typeface="Calibri" pitchFamily="34" charset="-122"/>
+                <a:cs typeface="Calibri" pitchFamily="34" charset="-120"/>
+              </a:rPr>
+              <a:t>The black line is a single real filter; the red dash is the baseline fitted underneath it, per spectrum. The shaded sliver is all that is actually bands.</a:t>
+            </a:r>
+            <a:endParaRPr lang="en-US" sz="1250" dirty="0"/>
+          </a:p>
+          <a:p>
+            <a:pPr algn="l" indent="0" marL="0">
+              <a:spcAft>
+                <a:spcPts val="800"/>
+              </a:spcAft>
+              <a:buNone/>
+            </a:pPr>
+            <a:r>
               <a:rPr lang="en-US" sz="1150" dirty="0">
                 <a:solidFill>
                   <a:srgbClr val="5E6369"/>
@@ -9703,7 +10332,7 @@
                 <a:ea typeface="Calibri" pitchFamily="34" charset="-122"/>
                 <a:cs typeface="Calibri" pitchFamily="34" charset="-120"/>
               </a:rPr>
-              <a:t>Port note: APRLssb reimplemented in Python and validated against your group's R output on the ETAD scans to ≤ 6×10⁻⁷ absorbance — your algorithm, not an approximation. EDF 6 vs 8: indistinguishable (Δslope &lt; 0.01).</a:t>
+              <a:t>Port note: reimplemented in Python and validated against your group's R output on the ETAD scans to ≤ 6×10⁻⁷ absorbance. EDF 6 vs 8: indistinguishable (Δslope &lt; 0.01).</a:t>
             </a:r>
             <a:endParaRPr lang="en-US" sz="1250" dirty="0"/>
           </a:p>
@@ -9717,7 +10346,7 @@
         </p:nvSpPr>
         <p:spPr>
           <a:xfrm>
-            <a:off x="502920" y="4572000"/>
+            <a:off x="502920" y="5074920"/>
             <a:ext cx="3246120" cy="402336"/>
           </a:xfrm>
           <a:prstGeom prst="roundRect">
@@ -9744,7 +10373,7 @@
         </p:nvSpPr>
         <p:spPr>
           <a:xfrm>
-            <a:off x="612648" y="4572000"/>
+            <a:off x="612648" y="5074920"/>
             <a:ext cx="3063240" cy="402336"/>
           </a:xfrm>
           <a:prstGeom prst="rect">
@@ -9797,7 +10426,7 @@
         </p:nvSpPr>
         <p:spPr>
           <a:xfrm>
-            <a:off x="502920" y="5084064"/>
+            <a:off x="502920" y="5586984"/>
             <a:ext cx="3246120" cy="402336"/>
           </a:xfrm>
           <a:prstGeom prst="roundRect">
@@ -9824,7 +10453,7 @@
         </p:nvSpPr>
         <p:spPr>
           <a:xfrm>
-            <a:off x="612648" y="5084064"/>
+            <a:off x="612648" y="5586984"/>
             <a:ext cx="3063240" cy="402336"/>
           </a:xfrm>
           <a:prstGeom prst="rect">
@@ -9877,7 +10506,7 @@
         </p:nvSpPr>
         <p:spPr>
           <a:xfrm>
-            <a:off x="502920" y="5596128"/>
+            <a:off x="502920" y="6099048"/>
             <a:ext cx="3246120" cy="402336"/>
           </a:xfrm>
           <a:prstGeom prst="roundRect">
@@ -9904,7 +10533,7 @@
         </p:nvSpPr>
         <p:spPr>
           <a:xfrm>
-            <a:off x="612648" y="5596128"/>
+            <a:off x="612648" y="6099048"/>
             <a:ext cx="3063240" cy="402336"/>
           </a:xfrm>
           <a:prstGeom prst="rect">
@@ -10093,7 +10722,7 @@
       </p:sp>
       <p:pic>
         <p:nvPicPr>
-          <p:cNvPr id="5" name="Image 0" descr="/Users/ahmadjalil/github/aethmodular/research/ftir_ec_phase3/output/plots/deck/airspec_2_corrected.png">    </p:cNvPr>
+          <p:cNvPr id="5" name="Image 0" descr="/private/tmp/claude-501/-Users-ahmadjalil-github-aethmodular/98af0981-a12c-4f18-82f4-663747dfdcd7/scratchpad/plates/airspec_2_corrected.png">    </p:cNvPr>
           <p:cNvPicPr>
             <a:picLocks noChangeAspect="1"/>
           </p:cNvPicPr>
@@ -10201,7 +10830,7 @@
       </p:sp>
       <p:pic>
         <p:nvPicPr>
-          <p:cNvPr id="8" name="Image 1" descr="/Users/ahmadjalil/github/aethmodular/research/ftir_ec_phase3/output/plots/deck/airspec_3_background_gap.png">    </p:cNvPr>
+          <p:cNvPr id="8" name="Image 1" descr="/private/tmp/claude-501/-Users-ahmadjalil-github-aethmodular/98af0981-a12c-4f18-82f4-663747dfdcd7/scratchpad/plates/airspec_3_background_gap.png">    </p:cNvPr>
           <p:cNvPicPr>
             <a:picLocks noChangeAspect="1"/>
           </p:cNvPicPr>
@@ -10444,7 +11073,7 @@
         <p:spPr>
           <a:xfrm>
             <a:off x="5362956" y="5989320"/>
-            <a:ext cx="2592324" cy="384048"/>
+            <a:ext cx="3195828" cy="384048"/>
           </a:xfrm>
           <a:prstGeom prst="roundRect">
             <a:avLst>
@@ -10471,7 +11100,7 @@
         <p:spPr>
           <a:xfrm>
             <a:off x="5436108" y="5989320"/>
-            <a:ext cx="2500884" cy="384048"/>
+            <a:ext cx="3104388" cy="384048"/>
           </a:xfrm>
           <a:prstGeom prst="rect">
             <a:avLst/>
@@ -10509,7 +11138,7 @@
                 <a:ea typeface="Calibri" pitchFamily="34" charset="-122"/>
                 <a:cs typeface="Calibri" pitchFamily="34" charset="-120"/>
               </a:rPr>
-              <a:t>−3.22 → −1.62</a:t>
+              <a:t>−3.22 → −1.62 µg/m³</a:t>
             </a:r>
             <a:endParaRPr lang="en-US" sz="1100" dirty="0"/>
           </a:p>
@@ -10523,7 +11152,7 @@
         </p:nvSpPr>
         <p:spPr>
           <a:xfrm>
-            <a:off x="8119872" y="5989320"/>
+            <a:off x="8723376" y="5989320"/>
             <a:ext cx="2043684" cy="384048"/>
           </a:xfrm>
           <a:prstGeom prst="roundRect">
@@ -10550,7 +11179,7 @@
         </p:nvSpPr>
         <p:spPr>
           <a:xfrm>
-            <a:off x="8193024" y="5989320"/>
+            <a:off x="8796528" y="5989320"/>
             <a:ext cx="1952244" cy="384048"/>
           </a:xfrm>
           <a:prstGeom prst="rect">
@@ -10739,7 +11368,7 @@
       </p:sp>
       <p:pic>
         <p:nvPicPr>
-          <p:cNvPr id="5" name="Image 0" descr="/Users/ahmadjalil/github/aethmodular/research/ftir_ec_phase3/output/plots/deck/by_protocol/site_held_out/crossplots_all_setups.png">    </p:cNvPr>
+          <p:cNvPr id="5" name="Image 0" descr="/private/tmp/claude-501/-Users-ahmadjalil-github-aethmodular/98af0981-a12c-4f18-82f4-663747dfdcd7/scratchpad/plates/crossplots_all_setups_shp.png">    </p:cNvPr>
           <p:cNvPicPr>
             <a:picLocks noChangeAspect="1"/>
           </p:cNvPicPr>
@@ -10889,7 +11518,7 @@
                 <a:ea typeface="Calibri" pitchFamily="34" charset="-122"/>
                 <a:cs typeface="Calibri" pitchFamily="34" charset="-120"/>
               </a:rPr>
-              <a:t>The open question for you: how much genuine EC signal does the correction discard, and is a middle path — or your group's newer baselining work — worth testing against AIRSpec?</a:t>
+              <a:t>The open question for you: how much genuine EC signal does the correction discard, and is a middle path — or your group's newer baselining work — worth testing?</a:t>
             </a:r>
             <a:endParaRPr lang="en-US" sz="1250" dirty="0"/>
           </a:p>
@@ -11035,7 +11664,7 @@
                 <a:ea typeface="Calibri" pitchFamily="34" charset="-122"/>
                 <a:cs typeface="Calibri" pitchFamily="34" charset="-120"/>
               </a:rPr>
-              <a:t>HIPS transfer post-AIRSpec  </a:t>
+              <a:t>HIPS transfer post-correction  </a:t>
             </a:r>
             <a:pPr indent="0" marL="0">
               <a:buNone/>
@@ -11120,7 +11749,7 @@
                 <a:ea typeface="Courier New" pitchFamily="34" charset="-122"/>
                 <a:cs typeface="Courier New" pitchFamily="34" charset="-120"/>
               </a:rPr>
-              <a:t>C·07 · WHAT THE MODELS LEAN ON — COMPONENT SELECTION</a:t>
+              <a:t>C·07 · HOW K WAS CHOSEN — ONE RULE, APPLIED TO EVERY SETUP</a:t>
             </a:r>
             <a:endParaRPr lang="en-US" sz="1100" dirty="0"/>
           </a:p>
@@ -11159,7 +11788,7 @@
                 <a:ea typeface="Calibri" pitchFamily="34" charset="-122"/>
                 <a:cs typeface="Calibri" pitchFamily="34" charset="-120"/>
               </a:rPr>
-              <a:t>What interleaved folds leak is the site's background, not its chemistry.</a:t>
+              <a:t>Site-grouped 5-fold CV, first major minimum — the curve each rule actually ran on.</a:t>
             </a:r>
             <a:endParaRPr lang="en-US" sz="2600" dirty="0"/>
           </a:p>
@@ -11199,7 +11828,7 @@
       </p:sp>
       <p:pic>
         <p:nvPicPr>
-          <p:cNvPr id="5" name="Image 0" descr="/Users/ahmadjalil/github/aethmodular/research/ftir_ec_phase3/output/plots/deck/component_selection_all_setups.png">    </p:cNvPr>
+          <p:cNvPr id="5" name="Image 0" descr="/private/tmp/claude-501/-Users-ahmadjalil-github-aethmodular/98af0981-a12c-4f18-82f4-663747dfdcd7/scratchpad/plates/selection_curves_site_heldout.png">    </p:cNvPr>
           <p:cNvPicPr>
             <a:picLocks noChangeAspect="1"/>
           </p:cNvPicPr>
@@ -11253,7 +11882,7 @@
                 <a:ea typeface="Courier New" pitchFamily="34" charset="-122"/>
                 <a:cs typeface="Courier New" pitchFamily="34" charset="-120"/>
               </a:rPr>
-              <a:t>ftir_20 · component_selection_all_setups   </a:t>
+              <a:t>ftir_23 · selection_curves_site_heldout   </a:t>
             </a:r>
             <a:pPr indent="0" marL="0">
               <a:buNone/>
@@ -11267,7 +11896,7 @@
                 <a:ea typeface="Calibri" pitchFamily="34" charset="-122"/>
                 <a:cs typeface="Calibri" pitchFamily="34" charset="-120"/>
               </a:rPr>
-              <a:t>%RMSECV (log y); solid = interleaved 10-fold, dashed = whole sites held out; blue = raw, red = 2nd derivative</a:t>
+              <a:t>Each cohort's CV curve with the rule's machinery drawn: ±1 SE ribbon, every local minimum, chosen k marked</a:t>
             </a:r>
             <a:endParaRPr lang="en-US" sz="850" dirty="0"/>
           </a:p>
@@ -11282,7 +11911,7 @@
         <p:spPr>
           <a:xfrm>
             <a:off x="502920" y="1737360"/>
-            <a:ext cx="3291840" cy="3657600"/>
+            <a:ext cx="3291840" cy="3931920"/>
           </a:xfrm>
           <a:prstGeom prst="rect">
             <a:avLst/>
@@ -11309,7 +11938,7 @@
                 <a:ea typeface="Calibri" pitchFamily="34" charset="-122"/>
                 <a:cs typeface="Calibri" pitchFamily="34" charset="-120"/>
               </a:rPr>
-              <a:t>Hold whole sites out and the error floor rises ×1.59 for biomass-smoke and ×1.41 for Ethiopia-shaped smoke — but only ×1.01–1.07 for the composition-selected cohorts.</a:t>
+              <a:t>One selection rule everywhere: site-grouped 5-fold CV, first major minimum. It picks k = 4–15 where the app protocol (interleaved 10-fold, within-5%) picks 17–27.</a:t>
             </a:r>
             <a:endParaRPr lang="en-US" sz="1250" dirty="0"/>
           </a:p>
@@ -11329,7 +11958,7 @@
                 <a:ea typeface="Calibri" pitchFamily="34" charset="-122"/>
                 <a:cs typeface="Calibri" pitchFamily="34" charset="-120"/>
               </a:rPr>
-              <a:t>On 2nd-derivative spectra the entire effect vanishes (every ratio 0.89–1.06): removing the smooth baseline removes the advantage of having seen the site.</a:t>
+              <a:t>Two subtleties Ann surfaced yesterday, answered here: the chosen k is selected on the training split, so it need not sit on a full-cohort curve's minimum; and small k is not a red flag on corrected spectra — the baseline components the big-k models spend factors on are already gone.</a:t>
             </a:r>
             <a:endParaRPr lang="en-US" sz="1250" dirty="0"/>
           </a:p>
@@ -11349,7 +11978,7 @@
                 <a:ea typeface="Calibri" pitchFamily="34" charset="-122"/>
                 <a:cs typeface="Calibri" pitchFamily="34" charset="-120"/>
               </a:rPr>
-              <a:t>Same conclusion as the AIRSpec slides, from fold structure instead of spectra. Not a criticism of the app as a tool — it answers a different question than transfer to an unseen site.</a:t>
+              <a:t>Where curves bottom early the protocols agree (smoke 4/4, corrected 5/5); the disagreement is long flat tails.</a:t>
             </a:r>
             <a:endParaRPr lang="en-US" sz="1250" dirty="0"/>
           </a:p>
@@ -11363,7 +11992,7 @@
         </p:nvSpPr>
         <p:spPr>
           <a:xfrm>
-            <a:off x="502920" y="5074920"/>
+            <a:off x="502920" y="5440680"/>
             <a:ext cx="3246120" cy="402336"/>
           </a:xfrm>
           <a:prstGeom prst="roundRect">
@@ -11390,7 +12019,7 @@
         </p:nvSpPr>
         <p:spPr>
           <a:xfrm>
-            <a:off x="612648" y="5074920"/>
+            <a:off x="612648" y="5440680"/>
             <a:ext cx="3063240" cy="402336"/>
           </a:xfrm>
           <a:prstGeom prst="rect">
@@ -11415,7 +12044,7 @@
                 <a:ea typeface="Calibri" pitchFamily="34" charset="-122"/>
                 <a:cs typeface="Calibri" pitchFamily="34" charset="-120"/>
               </a:rPr>
-              <a:t>smoke floor  </a:t>
+              <a:t>site-held-out k  </a:t>
             </a:r>
             <a:pPr indent="0" marL="0">
               <a:buNone/>
@@ -11423,13 +12052,13 @@
             <a:r>
               <a:rPr lang="en-US" sz="1100" b="1" dirty="0">
                 <a:solidFill>
-                  <a:srgbClr val="B23327"/>
-                </a:solidFill>
-                <a:latin typeface="Calibri" pitchFamily="34" charset="0"/>
-                <a:ea typeface="Calibri" pitchFamily="34" charset="-122"/>
-                <a:cs typeface="Calibri" pitchFamily="34" charset="-120"/>
-              </a:rPr>
-              <a:t>×1.59</a:t>
+                  <a:srgbClr val="2C6E9E"/>
+                </a:solidFill>
+                <a:latin typeface="Calibri" pitchFamily="34" charset="0"/>
+                <a:ea typeface="Calibri" pitchFamily="34" charset="-122"/>
+                <a:cs typeface="Calibri" pitchFamily="34" charset="-120"/>
+              </a:rPr>
+              <a:t>4–15</a:t>
             </a:r>
             <a:endParaRPr lang="en-US" sz="1100" dirty="0"/>
           </a:p>
@@ -11443,7 +12072,7 @@
         </p:nvSpPr>
         <p:spPr>
           <a:xfrm>
-            <a:off x="502920" y="5586984"/>
+            <a:off x="502920" y="5952744"/>
             <a:ext cx="3246120" cy="402336"/>
           </a:xfrm>
           <a:prstGeom prst="roundRect">
@@ -11470,7 +12099,7 @@
         </p:nvSpPr>
         <p:spPr>
           <a:xfrm>
-            <a:off x="612648" y="5586984"/>
+            <a:off x="612648" y="5952744"/>
             <a:ext cx="3063240" cy="402336"/>
           </a:xfrm>
           <a:prstGeom prst="rect">
@@ -11495,7 +12124,7 @@
                 <a:ea typeface="Calibri" pitchFamily="34" charset="-122"/>
                 <a:cs typeface="Calibri" pitchFamily="34" charset="-120"/>
               </a:rPr>
-              <a:t>lowest-OC/EC  </a:t>
+              <a:t>app-protocol k  </a:t>
             </a:r>
             <a:pPr indent="0" marL="0">
               <a:buNone/>
@@ -11503,93 +12132,13 @@
             <a:r>
               <a:rPr lang="en-US" sz="1100" b="1" dirty="0">
                 <a:solidFill>
-                  <a:srgbClr val="3F7A56"/>
-                </a:solidFill>
-                <a:latin typeface="Calibri" pitchFamily="34" charset="0"/>
-                <a:ea typeface="Calibri" pitchFamily="34" charset="-122"/>
-                <a:cs typeface="Calibri" pitchFamily="34" charset="-120"/>
-              </a:rPr>
-              <a:t>×1.01</a:t>
-            </a:r>
-            <a:endParaRPr lang="en-US" sz="1100" dirty="0"/>
-          </a:p>
-        </p:txBody>
-      </p:sp>
-      <p:sp>
-        <p:nvSpPr>
-          <p:cNvPr id="12" name="Shape 9"/>
-          <p:cNvSpPr/>
-          <p:nvPr/>
-        </p:nvSpPr>
-        <p:spPr>
-          <a:xfrm>
-            <a:off x="502920" y="6099048"/>
-            <a:ext cx="3246120" cy="402336"/>
-          </a:xfrm>
-          <a:prstGeom prst="roundRect">
-            <a:avLst>
-              <a:gd name="adj" fmla="val 13636"/>
-            </a:avLst>
-          </a:prstGeom>
-          <a:solidFill>
-            <a:srgbClr val="F4F5F3"/>
-          </a:solidFill>
-          <a:ln w="9525">
-            <a:solidFill>
-              <a:srgbClr val="DDE0DC"/>
-            </a:solidFill>
-            <a:prstDash val="solid"/>
-          </a:ln>
-        </p:spPr>
-      </p:sp>
-      <p:sp>
-        <p:nvSpPr>
-          <p:cNvPr id="13" name="Text 10"/>
-          <p:cNvSpPr/>
-          <p:nvPr/>
-        </p:nvSpPr>
-        <p:spPr>
-          <a:xfrm>
-            <a:off x="612648" y="6099048"/>
-            <a:ext cx="3063240" cy="402336"/>
-          </a:xfrm>
-          <a:prstGeom prst="rect">
-            <a:avLst/>
-          </a:prstGeom>
-          <a:noFill/>
-          <a:ln/>
-        </p:spPr>
-        <p:txBody>
-          <a:bodyPr wrap="square" lIns="0" tIns="0" rIns="0" bIns="0" rtlCol="0" anchor="ctr"/>
-          <a:lstStyle/>
-          <a:p>
-            <a:pPr indent="0" marL="0">
-              <a:buNone/>
-            </a:pPr>
-            <a:r>
-              <a:rPr lang="en-US" sz="1100" dirty="0">
-                <a:solidFill>
-                  <a:srgbClr val="5E6369"/>
-                </a:solidFill>
-                <a:latin typeface="Calibri" pitchFamily="34" charset="0"/>
-                <a:ea typeface="Calibri" pitchFamily="34" charset="-122"/>
-                <a:cs typeface="Calibri" pitchFamily="34" charset="-120"/>
-              </a:rPr>
-              <a:t>2nd-deriv ratios  </a:t>
-            </a:r>
-            <a:pPr indent="0" marL="0">
-              <a:buNone/>
-            </a:pPr>
-            <a:r>
-              <a:rPr lang="en-US" sz="1100" b="1" dirty="0">
-                <a:solidFill>
-                  <a:srgbClr val="2C6E9E"/>
-                </a:solidFill>
-                <a:latin typeface="Calibri" pitchFamily="34" charset="0"/>
-                <a:ea typeface="Calibri" pitchFamily="34" charset="-122"/>
-                <a:cs typeface="Calibri" pitchFamily="34" charset="-120"/>
-              </a:rPr>
-              <a:t>0.89–1.06</a:t>
+                  <a:srgbClr val="B0792B"/>
+                </a:solidFill>
+                <a:latin typeface="Calibri" pitchFamily="34" charset="0"/>
+                <a:ea typeface="Calibri" pitchFamily="34" charset="-122"/>
+                <a:cs typeface="Calibri" pitchFamily="34" charset="-120"/>
+              </a:rPr>
+              <a:t>17–27</a:t>
             </a:r>
             <a:endParaRPr lang="en-US" sz="1100" dirty="0"/>
           </a:p>
